--- a/ruggine-presentazione.pptx
+++ b/ruggine-presentazione.pptx
@@ -5,7 +5,7 @@
     <p:sldMasterId id="2147483648" r:id="rId1"/>
   </p:sldMasterIdLst>
   <p:notesMasterIdLst>
-    <p:notesMasterId r:id="rId20"/>
+    <p:notesMasterId r:id="rId18"/>
   </p:notesMasterIdLst>
   <p:sldIdLst>
     <p:sldId id="256" r:id="rId2"/>
@@ -19,13 +19,11 @@
     <p:sldId id="271" r:id="rId10"/>
     <p:sldId id="261" r:id="rId11"/>
     <p:sldId id="259" r:id="rId12"/>
-    <p:sldId id="264" r:id="rId13"/>
-    <p:sldId id="260" r:id="rId14"/>
-    <p:sldId id="265" r:id="rId15"/>
-    <p:sldId id="263" r:id="rId16"/>
-    <p:sldId id="267" r:id="rId17"/>
-    <p:sldId id="274" r:id="rId18"/>
-    <p:sldId id="268" r:id="rId19"/>
+    <p:sldId id="260" r:id="rId13"/>
+    <p:sldId id="263" r:id="rId14"/>
+    <p:sldId id="267" r:id="rId15"/>
+    <p:sldId id="274" r:id="rId16"/>
+    <p:sldId id="268" r:id="rId17"/>
   </p:sldIdLst>
   <p:sldSz cx="9144000" cy="5143500" type="screen16x9"/>
   <p:notesSz cx="5143500" cy="9144000"/>
@@ -561,7 +559,7 @@
           <a:p>
             <a:r>
               <a:rPr lang="en-US" dirty="0"/>
-              <a:t>Il codice del ConnectionActor mostra l'uso della macro select! per orchestrare i task concorrenti.</a:t>
+              <a:t>Il sistema di broadcast opera su due livelli: canali per conversazione e canali per utente.</a:t>
             </a:r>
           </a:p>
         </p:txBody>
@@ -648,7 +646,7 @@
           <a:p>
             <a:r>
               <a:rPr lang="en-US" dirty="0"/>
-              <a:t>Il sistema di broadcast opera su due livelli: canali per conversazione e canali per utente.</a:t>
+              <a:t>Lo schema database è ottimizzato con indici strategici e constraint di integrità referenziale.</a:t>
             </a:r>
           </a:p>
         </p:txBody>
@@ -735,7 +733,7 @@
           <a:p>
             <a:r>
               <a:rPr lang="en-US" dirty="0"/>
-              <a:t>Il broadcast system usa double-checked locking per performance e gestisce gracefully i casi senza receiver.</a:t>
+              <a:t>Il sistema è progettato per bassa latenza e alto throughput, con error handling robusto.</a:t>
             </a:r>
           </a:p>
         </p:txBody>
@@ -820,10 +818,7 @@
           <a:bodyPr/>
           <a:lstStyle/>
           <a:p>
-            <a:r>
-              <a:rPr lang="en-US" dirty="0"/>
-              <a:t>Lo schema database è ottimizzato con indici strategici e constraint di integrità referenziale.</a:t>
-            </a:r>
+            <a:endParaRPr lang="en-US" dirty="0"/>
           </a:p>
         </p:txBody>
       </p:sp>
@@ -909,7 +904,7 @@
           <a:p>
             <a:r>
               <a:rPr lang="en-US" dirty="0"/>
-              <a:t>Il sistema è progettato per bassa latenza e alto throughput, con error handling robusto.</a:t>
+              <a:t>In conclusione, abbiamo costruito un sistema completo che ci ha permesso di apprendere tecnologie avanzate.</a:t>
             </a:r>
           </a:p>
         </p:txBody>
@@ -932,177 +927,6 @@
             <a:fld id="{F7021451-1387-4CA6-816F-3879F97B5CBC}" type="slidenum">
               <a:rPr lang="en-US"/>
               <a:t>16</a:t>
-            </a:fld>
-            <a:endParaRPr lang="en-US"/>
-          </a:p>
-        </p:txBody>
-      </p:sp>
-    </p:spTree>
-    <p:extLst>
-      <p:ext uri="{BB962C8B-B14F-4D97-AF65-F5344CB8AC3E}">
-        <p14:creationId xmlns:p14="http://schemas.microsoft.com/office/powerpoint/2010/main" val="1024086991"/>
-      </p:ext>
-    </p:extLst>
-  </p:cSld>
-  <p:clrMapOvr>
-    <a:masterClrMapping/>
-  </p:clrMapOvr>
-</p:notes>
-</file>
-
-<file path=ppt/notesSlides/notesSlide17.xml><?xml version="1.0" encoding="utf-8"?>
-<p:notes xmlns:a="http://schemas.openxmlformats.org/drawingml/2006/main" xmlns:r="http://schemas.openxmlformats.org/officeDocument/2006/relationships" xmlns:p="http://schemas.openxmlformats.org/presentationml/2006/main">
-  <p:cSld>
-    <p:spTree>
-      <p:nvGrpSpPr>
-        <p:cNvPr id="1" name=""/>
-        <p:cNvGrpSpPr/>
-        <p:nvPr/>
-      </p:nvGrpSpPr>
-      <p:grpSpPr>
-        <a:xfrm>
-          <a:off x="0" y="0"/>
-          <a:ext cx="0" cy="0"/>
-          <a:chOff x="0" y="0"/>
-          <a:chExt cx="0" cy="0"/>
-        </a:xfrm>
-      </p:grpSpPr>
-      <p:sp>
-        <p:nvSpPr>
-          <p:cNvPr id="2" name="Slide Image Placeholder 1"/>
-          <p:cNvSpPr>
-            <a:spLocks noGrp="1" noRot="1" noChangeAspect="1"/>
-          </p:cNvSpPr>
-          <p:nvPr>
-            <p:ph type="sldImg"/>
-          </p:nvPr>
-        </p:nvSpPr>
-        <p:spPr/>
-      </p:sp>
-      <p:sp>
-        <p:nvSpPr>
-          <p:cNvPr id="3" name="Notes Placeholder 2"/>
-          <p:cNvSpPr>
-            <a:spLocks noGrp="1"/>
-          </p:cNvSpPr>
-          <p:nvPr>
-            <p:ph type="body" idx="1"/>
-          </p:nvPr>
-        </p:nvSpPr>
-        <p:spPr/>
-        <p:txBody>
-          <a:bodyPr/>
-          <a:lstStyle/>
-          <a:p>
-            <a:endParaRPr lang="en-US" dirty="0"/>
-          </a:p>
-        </p:txBody>
-      </p:sp>
-      <p:sp>
-        <p:nvSpPr>
-          <p:cNvPr id="4" name="Slide Number Placeholder 3"/>
-          <p:cNvSpPr>
-            <a:spLocks noGrp="1"/>
-          </p:cNvSpPr>
-          <p:nvPr>
-            <p:ph type="sldNum" sz="quarter" idx="10"/>
-          </p:nvPr>
-        </p:nvSpPr>
-        <p:spPr/>
-        <p:txBody>
-          <a:bodyPr/>
-          <a:lstStyle/>
-          <a:p>
-            <a:fld id="{F7021451-1387-4CA6-816F-3879F97B5CBC}" type="slidenum">
-              <a:rPr lang="en-US"/>
-              <a:t>17</a:t>
-            </a:fld>
-            <a:endParaRPr lang="en-US"/>
-          </a:p>
-        </p:txBody>
-      </p:sp>
-    </p:spTree>
-    <p:extLst>
-      <p:ext uri="{BB962C8B-B14F-4D97-AF65-F5344CB8AC3E}">
-        <p14:creationId xmlns:p14="http://schemas.microsoft.com/office/powerpoint/2010/main" val="1024086991"/>
-      </p:ext>
-    </p:extLst>
-  </p:cSld>
-  <p:clrMapOvr>
-    <a:masterClrMapping/>
-  </p:clrMapOvr>
-</p:notes>
-</file>
-
-<file path=ppt/notesSlides/notesSlide18.xml><?xml version="1.0" encoding="utf-8"?>
-<p:notes xmlns:a="http://schemas.openxmlformats.org/drawingml/2006/main" xmlns:r="http://schemas.openxmlformats.org/officeDocument/2006/relationships" xmlns:p="http://schemas.openxmlformats.org/presentationml/2006/main">
-  <p:cSld>
-    <p:spTree>
-      <p:nvGrpSpPr>
-        <p:cNvPr id="1" name=""/>
-        <p:cNvGrpSpPr/>
-        <p:nvPr/>
-      </p:nvGrpSpPr>
-      <p:grpSpPr>
-        <a:xfrm>
-          <a:off x="0" y="0"/>
-          <a:ext cx="0" cy="0"/>
-          <a:chOff x="0" y="0"/>
-          <a:chExt cx="0" cy="0"/>
-        </a:xfrm>
-      </p:grpSpPr>
-      <p:sp>
-        <p:nvSpPr>
-          <p:cNvPr id="2" name="Slide Image Placeholder 1"/>
-          <p:cNvSpPr>
-            <a:spLocks noGrp="1" noRot="1" noChangeAspect="1"/>
-          </p:cNvSpPr>
-          <p:nvPr>
-            <p:ph type="sldImg"/>
-          </p:nvPr>
-        </p:nvSpPr>
-        <p:spPr/>
-      </p:sp>
-      <p:sp>
-        <p:nvSpPr>
-          <p:cNvPr id="3" name="Notes Placeholder 2"/>
-          <p:cNvSpPr>
-            <a:spLocks noGrp="1"/>
-          </p:cNvSpPr>
-          <p:nvPr>
-            <p:ph type="body" idx="1"/>
-          </p:nvPr>
-        </p:nvSpPr>
-        <p:spPr/>
-        <p:txBody>
-          <a:bodyPr/>
-          <a:lstStyle/>
-          <a:p>
-            <a:r>
-              <a:rPr lang="en-US" dirty="0"/>
-              <a:t>In conclusione, abbiamo costruito un sistema completo che ci ha permesso di apprendere tecnologie avanzate.</a:t>
-            </a:r>
-          </a:p>
-        </p:txBody>
-      </p:sp>
-      <p:sp>
-        <p:nvSpPr>
-          <p:cNvPr id="4" name="Slide Number Placeholder 3"/>
-          <p:cNvSpPr>
-            <a:spLocks noGrp="1"/>
-          </p:cNvSpPr>
-          <p:nvPr>
-            <p:ph type="sldNum" sz="quarter" idx="10"/>
-          </p:nvPr>
-        </p:nvSpPr>
-        <p:spPr/>
-        <p:txBody>
-          <a:bodyPr/>
-          <a:lstStyle/>
-          <a:p>
-            <a:fld id="{F7021451-1387-4CA6-816F-3879F97B5CBC}" type="slidenum">
-              <a:rPr lang="en-US"/>
-              <a:t>18</a:t>
             </a:fld>
             <a:endParaRPr lang="en-US"/>
           </a:p>
@@ -5599,1208 +5423,6 @@
 
 <file path=ppt/slides/slide12.xml><?xml version="1.0" encoding="utf-8"?>
 <p:sld xmlns:a="http://schemas.openxmlformats.org/drawingml/2006/main" xmlns:r="http://schemas.openxmlformats.org/officeDocument/2006/relationships" xmlns:p="http://schemas.openxmlformats.org/presentationml/2006/main">
-  <p:cSld name="Slide 9">
-    <p:bg>
-      <p:bgPr>
-        <a:solidFill>
-          <a:srgbClr val="1A1A2E"/>
-        </a:solidFill>
-        <a:effectLst/>
-      </p:bgPr>
-    </p:bg>
-    <p:spTree>
-      <p:nvGrpSpPr>
-        <p:cNvPr id="1" name=""/>
-        <p:cNvGrpSpPr/>
-        <p:nvPr/>
-      </p:nvGrpSpPr>
-      <p:grpSpPr>
-        <a:xfrm>
-          <a:off x="0" y="0"/>
-          <a:ext cx="0" cy="0"/>
-          <a:chOff x="0" y="0"/>
-          <a:chExt cx="0" cy="0"/>
-        </a:xfrm>
-      </p:grpSpPr>
-      <p:sp>
-        <p:nvSpPr>
-          <p:cNvPr id="2" name="Text 0"/>
-          <p:cNvSpPr/>
-          <p:nvPr/>
-        </p:nvSpPr>
-        <p:spPr>
-          <a:xfrm>
-            <a:off x="0" y="0"/>
-            <a:ext cx="76200" cy="5143500"/>
-          </a:xfrm>
-          <a:prstGeom prst="rect">
-            <a:avLst/>
-          </a:prstGeom>
-          <a:solidFill>
-            <a:srgbClr val="F97316"/>
-          </a:solidFill>
-          <a:ln/>
-        </p:spPr>
-        <p:txBody>
-          <a:bodyPr wrap="square" rtlCol="0" anchor="ctr"/>
-          <a:lstStyle/>
-          <a:p>
-            <a:pPr marL="0" indent="0">
-              <a:buNone/>
-            </a:pPr>
-            <a:endParaRPr lang="en-US" dirty="0"/>
-          </a:p>
-        </p:txBody>
-      </p:sp>
-      <p:sp>
-        <p:nvSpPr>
-          <p:cNvPr id="3" name="Text 1"/>
-          <p:cNvSpPr/>
-          <p:nvPr/>
-        </p:nvSpPr>
-        <p:spPr>
-          <a:xfrm>
-            <a:off x="571500" y="266700"/>
-            <a:ext cx="4187381" cy="285750"/>
-          </a:xfrm>
-          <a:prstGeom prst="rect">
-            <a:avLst/>
-          </a:prstGeom>
-          <a:noFill/>
-          <a:ln/>
-        </p:spPr>
-        <p:txBody>
-          <a:bodyPr wrap="square" lIns="0" tIns="0" rIns="0" bIns="0" rtlCol="0" anchor="t"/>
-          <a:lstStyle/>
-          <a:p>
-            <a:pPr marL="0" indent="0" algn="l">
-              <a:lnSpc>
-                <a:spcPts val="2250"/>
-              </a:lnSpc>
-              <a:buNone/>
-            </a:pPr>
-            <a:r>
-              <a:rPr lang="en-US" sz="2250" b="1" dirty="0">
-                <a:solidFill>
-                  <a:srgbClr val="FFFFFF"/>
-                </a:solidFill>
-                <a:latin typeface="Arial" pitchFamily="34" charset="0"/>
-                <a:ea typeface="Arial" pitchFamily="34" charset="-122"/>
-                <a:cs typeface="Arial" pitchFamily="34" charset="-120"/>
-              </a:rPr>
-              <a:t>Codice: ConnectionActor</a:t>
-            </a:r>
-            <a:endParaRPr lang="en-US" sz="2250" dirty="0"/>
-          </a:p>
-        </p:txBody>
-      </p:sp>
-      <p:sp>
-        <p:nvSpPr>
-          <p:cNvPr id="4" name="Text 2"/>
-          <p:cNvSpPr/>
-          <p:nvPr/>
-        </p:nvSpPr>
-        <p:spPr>
-          <a:xfrm>
-            <a:off x="476250" y="958155"/>
-            <a:ext cx="8191500" cy="1123950"/>
-          </a:xfrm>
-          <a:prstGeom prst="roundRect">
-            <a:avLst>
-              <a:gd name="adj" fmla="val 8475"/>
-            </a:avLst>
-          </a:prstGeom>
-          <a:solidFill>
-            <a:srgbClr val="0D0D1A"/>
-          </a:solidFill>
-          <a:ln w="9525">
-            <a:solidFill>
-              <a:srgbClr val="3D3D56"/>
-            </a:solidFill>
-          </a:ln>
-        </p:spPr>
-        <p:txBody>
-          <a:bodyPr wrap="square" rtlCol="0" anchor="ctr"/>
-          <a:lstStyle/>
-          <a:p>
-            <a:pPr marL="0" indent="0">
-              <a:buNone/>
-            </a:pPr>
-            <a:endParaRPr lang="en-US" dirty="0"/>
-          </a:p>
-        </p:txBody>
-      </p:sp>
-      <p:sp>
-        <p:nvSpPr>
-          <p:cNvPr id="5" name="Text 3"/>
-          <p:cNvSpPr/>
-          <p:nvPr/>
-        </p:nvSpPr>
-        <p:spPr>
-          <a:xfrm>
-            <a:off x="676275" y="1120080"/>
-            <a:ext cx="7947279" cy="266700"/>
-          </a:xfrm>
-          <a:prstGeom prst="rect">
-            <a:avLst/>
-          </a:prstGeom>
-          <a:noFill/>
-          <a:ln/>
-        </p:spPr>
-        <p:txBody>
-          <a:bodyPr wrap="square" lIns="0" tIns="0" rIns="0" bIns="0" rtlCol="0" anchor="t"/>
-          <a:lstStyle/>
-          <a:p>
-            <a:pPr marL="0" indent="0" algn="l">
-              <a:lnSpc>
-                <a:spcPts val="2100"/>
-              </a:lnSpc>
-              <a:buNone/>
-            </a:pPr>
-            <a:r>
-              <a:rPr lang="en-US" sz="1500" dirty="0">
-                <a:solidFill>
-                  <a:srgbClr val="F97316"/>
-                </a:solidFill>
-                <a:latin typeface="Arial" pitchFamily="34" charset="0"/>
-                <a:ea typeface="Arial" pitchFamily="34" charset="-122"/>
-                <a:cs typeface="Arial" pitchFamily="34" charset="-120"/>
-              </a:rPr>
-              <a:t>let</a:t>
-            </a:r>
-            <a:r>
-              <a:rPr lang="en-US" sz="1500" dirty="0">
-                <a:solidFill>
-                  <a:srgbClr val="B8B8D0"/>
-                </a:solidFill>
-                <a:latin typeface="Arial" pitchFamily="34" charset="0"/>
-                <a:ea typeface="Arial" pitchFamily="34" charset="-122"/>
-                <a:cs typeface="Arial" pitchFamily="34" charset="-120"/>
-              </a:rPr>
-              <a:t> (ws_tx, ws_rx) = socket.</a:t>
-            </a:r>
-            <a:r>
-              <a:rPr lang="en-US" sz="1500" dirty="0">
-                <a:solidFill>
-                  <a:srgbClr val="3B82F6"/>
-                </a:solidFill>
-                <a:latin typeface="Arial" pitchFamily="34" charset="0"/>
-                <a:ea typeface="Arial" pitchFamily="34" charset="-122"/>
-                <a:cs typeface="Arial" pitchFamily="34" charset="-120"/>
-              </a:rPr>
-              <a:t>split</a:t>
-            </a:r>
-            <a:r>
-              <a:rPr lang="en-US" sz="1500" dirty="0">
-                <a:solidFill>
-                  <a:srgbClr val="B8B8D0"/>
-                </a:solidFill>
-                <a:latin typeface="Arial" pitchFamily="34" charset="0"/>
-                <a:ea typeface="Arial" pitchFamily="34" charset="-122"/>
-                <a:cs typeface="Arial" pitchFamily="34" charset="-120"/>
-              </a:rPr>
-              <a:t>();</a:t>
-            </a:r>
-            <a:endParaRPr lang="en-US" sz="1500" dirty="0"/>
-          </a:p>
-        </p:txBody>
-      </p:sp>
-      <p:sp>
-        <p:nvSpPr>
-          <p:cNvPr id="6" name="Text 4"/>
-          <p:cNvSpPr/>
-          <p:nvPr/>
-        </p:nvSpPr>
-        <p:spPr>
-          <a:xfrm>
-            <a:off x="676275" y="1386780"/>
-            <a:ext cx="7947279" cy="266700"/>
-          </a:xfrm>
-          <a:prstGeom prst="rect">
-            <a:avLst/>
-          </a:prstGeom>
-          <a:noFill/>
-          <a:ln/>
-        </p:spPr>
-        <p:txBody>
-          <a:bodyPr wrap="square" lIns="0" tIns="0" rIns="0" bIns="0" rtlCol="0" anchor="t"/>
-          <a:lstStyle/>
-          <a:p>
-            <a:pPr marL="0" indent="0" algn="l">
-              <a:lnSpc>
-                <a:spcPts val="2100"/>
-              </a:lnSpc>
-              <a:buNone/>
-            </a:pPr>
-            <a:r>
-              <a:rPr lang="en-US" sz="1500" dirty="0">
-                <a:solidFill>
-                  <a:srgbClr val="F97316"/>
-                </a:solidFill>
-                <a:latin typeface="Arial" pitchFamily="34" charset="0"/>
-                <a:ea typeface="Arial" pitchFamily="34" charset="-122"/>
-                <a:cs typeface="Arial" pitchFamily="34" charset="-120"/>
-              </a:rPr>
-              <a:t>let</a:t>
-            </a:r>
-            <a:r>
-              <a:rPr lang="en-US" sz="1500" dirty="0">
-                <a:solidFill>
-                  <a:srgbClr val="B8B8D0"/>
-                </a:solidFill>
-                <a:latin typeface="Arial" pitchFamily="34" charset="0"/>
-                <a:ea typeface="Arial" pitchFamily="34" charset="-122"/>
-                <a:cs typeface="Arial" pitchFamily="34" charset="-120"/>
-              </a:rPr>
-              <a:t> (stop_tx, stop_rx) = </a:t>
-            </a:r>
-            <a:r>
-              <a:rPr lang="en-US" sz="1500" dirty="0">
-                <a:solidFill>
-                  <a:srgbClr val="A855F7"/>
-                </a:solidFill>
-                <a:latin typeface="Arial" pitchFamily="34" charset="0"/>
-                <a:ea typeface="Arial" pitchFamily="34" charset="-122"/>
-                <a:cs typeface="Arial" pitchFamily="34" charset="-120"/>
-              </a:rPr>
-              <a:t>watch::channel</a:t>
-            </a:r>
-            <a:r>
-              <a:rPr lang="en-US" sz="1500" dirty="0">
-                <a:solidFill>
-                  <a:srgbClr val="B8B8D0"/>
-                </a:solidFill>
-                <a:latin typeface="Arial" pitchFamily="34" charset="0"/>
-                <a:ea typeface="Arial" pitchFamily="34" charset="-122"/>
-                <a:cs typeface="Arial" pitchFamily="34" charset="-120"/>
-              </a:rPr>
-              <a:t>(</a:t>
-            </a:r>
-            <a:r>
-              <a:rPr lang="en-US" sz="1500" dirty="0">
-                <a:solidFill>
-                  <a:srgbClr val="22C55E"/>
-                </a:solidFill>
-                <a:latin typeface="Arial" pitchFamily="34" charset="0"/>
-                <a:ea typeface="Arial" pitchFamily="34" charset="-122"/>
-                <a:cs typeface="Arial" pitchFamily="34" charset="-120"/>
-              </a:rPr>
-              <a:t>false</a:t>
-            </a:r>
-            <a:r>
-              <a:rPr lang="en-US" sz="1500" dirty="0">
-                <a:solidFill>
-                  <a:srgbClr val="B8B8D0"/>
-                </a:solidFill>
-                <a:latin typeface="Arial" pitchFamily="34" charset="0"/>
-                <a:ea typeface="Arial" pitchFamily="34" charset="-122"/>
-                <a:cs typeface="Arial" pitchFamily="34" charset="-120"/>
-              </a:rPr>
-              <a:t>);</a:t>
-            </a:r>
-            <a:endParaRPr lang="en-US" sz="1500" dirty="0"/>
-          </a:p>
-        </p:txBody>
-      </p:sp>
-      <p:sp>
-        <p:nvSpPr>
-          <p:cNvPr id="7" name="Text 5"/>
-          <p:cNvSpPr/>
-          <p:nvPr/>
-        </p:nvSpPr>
-        <p:spPr>
-          <a:xfrm>
-            <a:off x="676275" y="1653480"/>
-            <a:ext cx="7947279" cy="266700"/>
-          </a:xfrm>
-          <a:prstGeom prst="rect">
-            <a:avLst/>
-          </a:prstGeom>
-          <a:noFill/>
-          <a:ln/>
-        </p:spPr>
-        <p:txBody>
-          <a:bodyPr wrap="square" lIns="0" tIns="0" rIns="0" bIns="0" rtlCol="0" anchor="t"/>
-          <a:lstStyle/>
-          <a:p>
-            <a:pPr marL="0" indent="0" algn="l">
-              <a:lnSpc>
-                <a:spcPts val="2100"/>
-              </a:lnSpc>
-              <a:buNone/>
-            </a:pPr>
-            <a:r>
-              <a:rPr lang="en-US" sz="1500" dirty="0">
-                <a:solidFill>
-                  <a:srgbClr val="F97316"/>
-                </a:solidFill>
-                <a:latin typeface="Arial" pitchFamily="34" charset="0"/>
-                <a:ea typeface="Arial" pitchFamily="34" charset="-122"/>
-                <a:cs typeface="Arial" pitchFamily="34" charset="-120"/>
-              </a:rPr>
-              <a:t>let</a:t>
-            </a:r>
-            <a:r>
-              <a:rPr lang="en-US" sz="1500" dirty="0">
-                <a:solidFill>
-                  <a:srgbClr val="B8B8D0"/>
-                </a:solidFill>
-                <a:latin typeface="Arial" pitchFamily="34" charset="0"/>
-                <a:ea typeface="Arial" pitchFamily="34" charset="-122"/>
-                <a:cs typeface="Arial" pitchFamily="34" charset="-120"/>
-              </a:rPr>
-              <a:t> (out_tx, out_rx) = </a:t>
-            </a:r>
-            <a:r>
-              <a:rPr lang="en-US" sz="1500" dirty="0">
-                <a:solidFill>
-                  <a:srgbClr val="A855F7"/>
-                </a:solidFill>
-                <a:latin typeface="Arial" pitchFamily="34" charset="0"/>
-                <a:ea typeface="Arial" pitchFamily="34" charset="-122"/>
-                <a:cs typeface="Arial" pitchFamily="34" charset="-120"/>
-              </a:rPr>
-              <a:t>mpsc::channel</a:t>
-            </a:r>
-            <a:r>
-              <a:rPr lang="en-US" sz="1500" dirty="0">
-                <a:solidFill>
-                  <a:srgbClr val="B8B8D0"/>
-                </a:solidFill>
-                <a:latin typeface="Arial" pitchFamily="34" charset="0"/>
-                <a:ea typeface="Arial" pitchFamily="34" charset="-122"/>
-                <a:cs typeface="Arial" pitchFamily="34" charset="-120"/>
-              </a:rPr>
-              <a:t>(</a:t>
-            </a:r>
-            <a:r>
-              <a:rPr lang="en-US" sz="1500" dirty="0">
-                <a:solidFill>
-                  <a:srgbClr val="EAB308"/>
-                </a:solidFill>
-                <a:latin typeface="Arial" pitchFamily="34" charset="0"/>
-                <a:ea typeface="Arial" pitchFamily="34" charset="-122"/>
-                <a:cs typeface="Arial" pitchFamily="34" charset="-120"/>
-              </a:rPr>
-              <a:t>1024</a:t>
-            </a:r>
-            <a:r>
-              <a:rPr lang="en-US" sz="1500" dirty="0">
-                <a:solidFill>
-                  <a:srgbClr val="B8B8D0"/>
-                </a:solidFill>
-                <a:latin typeface="Arial" pitchFamily="34" charset="0"/>
-                <a:ea typeface="Arial" pitchFamily="34" charset="-122"/>
-                <a:cs typeface="Arial" pitchFamily="34" charset="-120"/>
-              </a:rPr>
-              <a:t>);</a:t>
-            </a:r>
-            <a:endParaRPr lang="en-US" sz="1500" dirty="0"/>
-          </a:p>
-        </p:txBody>
-      </p:sp>
-      <p:sp>
-        <p:nvSpPr>
-          <p:cNvPr id="8" name="Text 6"/>
-          <p:cNvSpPr/>
-          <p:nvPr/>
-        </p:nvSpPr>
-        <p:spPr>
-          <a:xfrm>
-            <a:off x="476250" y="2215455"/>
-            <a:ext cx="8191500" cy="1657350"/>
-          </a:xfrm>
-          <a:prstGeom prst="roundRect">
-            <a:avLst>
-              <a:gd name="adj" fmla="val 5747"/>
-            </a:avLst>
-          </a:prstGeom>
-          <a:solidFill>
-            <a:srgbClr val="0D0D1A"/>
-          </a:solidFill>
-          <a:ln w="9525">
-            <a:solidFill>
-              <a:srgbClr val="3D3D56"/>
-            </a:solidFill>
-          </a:ln>
-        </p:spPr>
-        <p:txBody>
-          <a:bodyPr wrap="square" rtlCol="0" anchor="ctr"/>
-          <a:lstStyle/>
-          <a:p>
-            <a:pPr marL="0" indent="0">
-              <a:buNone/>
-            </a:pPr>
-            <a:endParaRPr lang="en-US" dirty="0"/>
-          </a:p>
-        </p:txBody>
-      </p:sp>
-      <p:sp>
-        <p:nvSpPr>
-          <p:cNvPr id="9" name="Text 7"/>
-          <p:cNvSpPr/>
-          <p:nvPr/>
-        </p:nvSpPr>
-        <p:spPr>
-          <a:xfrm>
-            <a:off x="676275" y="2377380"/>
-            <a:ext cx="7947279" cy="266700"/>
-          </a:xfrm>
-          <a:prstGeom prst="rect">
-            <a:avLst/>
-          </a:prstGeom>
-          <a:noFill/>
-          <a:ln/>
-        </p:spPr>
-        <p:txBody>
-          <a:bodyPr wrap="square" lIns="0" tIns="0" rIns="0" bIns="0" rtlCol="0" anchor="t"/>
-          <a:lstStyle/>
-          <a:p>
-            <a:pPr marL="0" indent="0" algn="l">
-              <a:lnSpc>
-                <a:spcPts val="2100"/>
-              </a:lnSpc>
-              <a:buNone/>
-            </a:pPr>
-            <a:r>
-              <a:rPr lang="en-US" sz="1500" dirty="0">
-                <a:solidFill>
-                  <a:srgbClr val="F97316"/>
-                </a:solidFill>
-                <a:latin typeface="Arial" pitchFamily="34" charset="0"/>
-                <a:ea typeface="Arial" pitchFamily="34" charset="-122"/>
-                <a:cs typeface="Arial" pitchFamily="34" charset="-120"/>
-              </a:rPr>
-              <a:t>select!</a:t>
-            </a:r>
-            <a:r>
-              <a:rPr lang="en-US" sz="1500" dirty="0">
-                <a:solidFill>
-                  <a:srgbClr val="B8B8D0"/>
-                </a:solidFill>
-                <a:latin typeface="Arial" pitchFamily="34" charset="0"/>
-                <a:ea typeface="Arial" pitchFamily="34" charset="-122"/>
-                <a:cs typeface="Arial" pitchFamily="34" charset="-120"/>
-              </a:rPr>
-              <a:t> {</a:t>
-            </a:r>
-            <a:endParaRPr lang="en-US" sz="1500" dirty="0"/>
-          </a:p>
-        </p:txBody>
-      </p:sp>
-      <p:sp>
-        <p:nvSpPr>
-          <p:cNvPr id="10" name="Text 8"/>
-          <p:cNvSpPr/>
-          <p:nvPr/>
-        </p:nvSpPr>
-        <p:spPr>
-          <a:xfrm>
-            <a:off x="676275" y="2644080"/>
-            <a:ext cx="7947279" cy="266700"/>
-          </a:xfrm>
-          <a:prstGeom prst="rect">
-            <a:avLst/>
-          </a:prstGeom>
-          <a:noFill/>
-          <a:ln/>
-        </p:spPr>
-        <p:txBody>
-          <a:bodyPr wrap="square" lIns="152400" tIns="0" rIns="0" bIns="0" rtlCol="0" anchor="t"/>
-          <a:lstStyle/>
-          <a:p>
-            <a:pPr marL="0" indent="0" algn="l">
-              <a:lnSpc>
-                <a:spcPts val="2100"/>
-              </a:lnSpc>
-              <a:buNone/>
-            </a:pPr>
-            <a:r>
-              <a:rPr lang="en-US" sz="1500" dirty="0">
-                <a:solidFill>
-                  <a:srgbClr val="B8B8D0"/>
-                </a:solidFill>
-                <a:latin typeface="Arial" pitchFamily="34" charset="0"/>
-                <a:ea typeface="Arial" pitchFamily="34" charset="-122"/>
-                <a:cs typeface="Arial" pitchFamily="34" charset="-120"/>
-              </a:rPr>
-              <a:t>_ = reader =&gt; { stop_tx.</a:t>
-            </a:r>
-            <a:r>
-              <a:rPr lang="en-US" sz="1500" dirty="0">
-                <a:solidFill>
-                  <a:srgbClr val="3B82F6"/>
-                </a:solidFill>
-                <a:latin typeface="Arial" pitchFamily="34" charset="0"/>
-                <a:ea typeface="Arial" pitchFamily="34" charset="-122"/>
-                <a:cs typeface="Arial" pitchFamily="34" charset="-120"/>
-              </a:rPr>
-              <a:t>send</a:t>
-            </a:r>
-            <a:r>
-              <a:rPr lang="en-US" sz="1500" dirty="0">
-                <a:solidFill>
-                  <a:srgbClr val="B8B8D0"/>
-                </a:solidFill>
-                <a:latin typeface="Arial" pitchFamily="34" charset="0"/>
-                <a:ea typeface="Arial" pitchFamily="34" charset="-122"/>
-                <a:cs typeface="Arial" pitchFamily="34" charset="-120"/>
-              </a:rPr>
-              <a:t>(</a:t>
-            </a:r>
-            <a:r>
-              <a:rPr lang="en-US" sz="1500" dirty="0">
-                <a:solidFill>
-                  <a:srgbClr val="22C55E"/>
-                </a:solidFill>
-                <a:latin typeface="Arial" pitchFamily="34" charset="0"/>
-                <a:ea typeface="Arial" pitchFamily="34" charset="-122"/>
-                <a:cs typeface="Arial" pitchFamily="34" charset="-120"/>
-              </a:rPr>
-              <a:t>true</a:t>
-            </a:r>
-            <a:r>
-              <a:rPr lang="en-US" sz="1500" dirty="0">
-                <a:solidFill>
-                  <a:srgbClr val="B8B8D0"/>
-                </a:solidFill>
-                <a:latin typeface="Arial" pitchFamily="34" charset="0"/>
-                <a:ea typeface="Arial" pitchFamily="34" charset="-122"/>
-                <a:cs typeface="Arial" pitchFamily="34" charset="-120"/>
-              </a:rPr>
-              <a:t>); recv.</a:t>
-            </a:r>
-            <a:r>
-              <a:rPr lang="en-US" sz="1500" dirty="0">
-                <a:solidFill>
-                  <a:srgbClr val="EF4444"/>
-                </a:solidFill>
-                <a:latin typeface="Arial" pitchFamily="34" charset="0"/>
-                <a:ea typeface="Arial" pitchFamily="34" charset="-122"/>
-                <a:cs typeface="Arial" pitchFamily="34" charset="-120"/>
-              </a:rPr>
-              <a:t>abort</a:t>
-            </a:r>
-            <a:r>
-              <a:rPr lang="en-US" sz="1500" dirty="0">
-                <a:solidFill>
-                  <a:srgbClr val="B8B8D0"/>
-                </a:solidFill>
-                <a:latin typeface="Arial" pitchFamily="34" charset="0"/>
-                <a:ea typeface="Arial" pitchFamily="34" charset="-122"/>
-                <a:cs typeface="Arial" pitchFamily="34" charset="-120"/>
-              </a:rPr>
-              <a:t>(); }</a:t>
-            </a:r>
-            <a:endParaRPr lang="en-US" sz="1500" dirty="0"/>
-          </a:p>
-        </p:txBody>
-      </p:sp>
-      <p:sp>
-        <p:nvSpPr>
-          <p:cNvPr id="11" name="Text 9"/>
-          <p:cNvSpPr/>
-          <p:nvPr/>
-        </p:nvSpPr>
-        <p:spPr>
-          <a:xfrm>
-            <a:off x="676275" y="2910780"/>
-            <a:ext cx="7947279" cy="266700"/>
-          </a:xfrm>
-          <a:prstGeom prst="rect">
-            <a:avLst/>
-          </a:prstGeom>
-          <a:noFill/>
-          <a:ln/>
-        </p:spPr>
-        <p:txBody>
-          <a:bodyPr wrap="square" lIns="152400" tIns="0" rIns="0" bIns="0" rtlCol="0" anchor="t"/>
-          <a:lstStyle/>
-          <a:p>
-            <a:pPr marL="0" indent="0" algn="l">
-              <a:lnSpc>
-                <a:spcPts val="2100"/>
-              </a:lnSpc>
-              <a:buNone/>
-            </a:pPr>
-            <a:r>
-              <a:rPr lang="en-US" sz="1500" dirty="0">
-                <a:solidFill>
-                  <a:srgbClr val="B8B8D0"/>
-                </a:solidFill>
-                <a:latin typeface="Arial" pitchFamily="34" charset="0"/>
-                <a:ea typeface="Arial" pitchFamily="34" charset="-122"/>
-                <a:cs typeface="Arial" pitchFamily="34" charset="-120"/>
-              </a:rPr>
-              <a:t>_ = receiver =&gt; { reader.</a:t>
-            </a:r>
-            <a:r>
-              <a:rPr lang="en-US" sz="1500" dirty="0">
-                <a:solidFill>
-                  <a:srgbClr val="EF4444"/>
-                </a:solidFill>
-                <a:latin typeface="Arial" pitchFamily="34" charset="0"/>
-                <a:ea typeface="Arial" pitchFamily="34" charset="-122"/>
-                <a:cs typeface="Arial" pitchFamily="34" charset="-120"/>
-              </a:rPr>
-              <a:t>abort</a:t>
-            </a:r>
-            <a:r>
-              <a:rPr lang="en-US" sz="1500" dirty="0">
-                <a:solidFill>
-                  <a:srgbClr val="B8B8D0"/>
-                </a:solidFill>
-                <a:latin typeface="Arial" pitchFamily="34" charset="0"/>
-                <a:ea typeface="Arial" pitchFamily="34" charset="-122"/>
-                <a:cs typeface="Arial" pitchFamily="34" charset="-120"/>
-              </a:rPr>
-              <a:t>(); ... }</a:t>
-            </a:r>
-            <a:endParaRPr lang="en-US" sz="1500" dirty="0"/>
-          </a:p>
-        </p:txBody>
-      </p:sp>
-      <p:sp>
-        <p:nvSpPr>
-          <p:cNvPr id="12" name="Text 10"/>
-          <p:cNvSpPr/>
-          <p:nvPr/>
-        </p:nvSpPr>
-        <p:spPr>
-          <a:xfrm>
-            <a:off x="676275" y="3177480"/>
-            <a:ext cx="7947279" cy="266700"/>
-          </a:xfrm>
-          <a:prstGeom prst="rect">
-            <a:avLst/>
-          </a:prstGeom>
-          <a:noFill/>
-          <a:ln/>
-        </p:spPr>
-        <p:txBody>
-          <a:bodyPr wrap="square" lIns="152400" tIns="0" rIns="0" bIns="0" rtlCol="0" anchor="t"/>
-          <a:lstStyle/>
-          <a:p>
-            <a:pPr marL="0" indent="0" algn="l">
-              <a:lnSpc>
-                <a:spcPts val="2100"/>
-              </a:lnSpc>
-              <a:buNone/>
-            </a:pPr>
-            <a:r>
-              <a:rPr lang="en-US" sz="1500" dirty="0">
-                <a:solidFill>
-                  <a:srgbClr val="B8B8D0"/>
-                </a:solidFill>
-                <a:latin typeface="Arial" pitchFamily="34" charset="0"/>
-                <a:ea typeface="Arial" pitchFamily="34" charset="-122"/>
-                <a:cs typeface="Arial" pitchFamily="34" charset="-120"/>
-              </a:rPr>
-              <a:t>_ = writer =&gt; { ... }</a:t>
-            </a:r>
-            <a:endParaRPr lang="en-US" sz="1500" dirty="0"/>
-          </a:p>
-        </p:txBody>
-      </p:sp>
-      <p:sp>
-        <p:nvSpPr>
-          <p:cNvPr id="13" name="Text 11"/>
-          <p:cNvSpPr/>
-          <p:nvPr/>
-        </p:nvSpPr>
-        <p:spPr>
-          <a:xfrm>
-            <a:off x="676275" y="3444180"/>
-            <a:ext cx="7947279" cy="266700"/>
-          </a:xfrm>
-          <a:prstGeom prst="rect">
-            <a:avLst/>
-          </a:prstGeom>
-          <a:noFill/>
-          <a:ln/>
-        </p:spPr>
-        <p:txBody>
-          <a:bodyPr wrap="square" lIns="0" tIns="0" rIns="0" bIns="0" rtlCol="0" anchor="t"/>
-          <a:lstStyle/>
-          <a:p>
-            <a:pPr marL="0" indent="0" algn="l">
-              <a:lnSpc>
-                <a:spcPts val="2100"/>
-              </a:lnSpc>
-              <a:buNone/>
-            </a:pPr>
-            <a:r>
-              <a:rPr lang="en-US" sz="1500" dirty="0">
-                <a:solidFill>
-                  <a:srgbClr val="B8B8D0"/>
-                </a:solidFill>
-                <a:latin typeface="Arial" pitchFamily="34" charset="0"/>
-                <a:ea typeface="Arial" pitchFamily="34" charset="-122"/>
-                <a:cs typeface="Arial" pitchFamily="34" charset="-120"/>
-              </a:rPr>
-              <a:t>}</a:t>
-            </a:r>
-            <a:endParaRPr lang="en-US" sz="1500" dirty="0"/>
-          </a:p>
-        </p:txBody>
-      </p:sp>
-      <p:sp>
-        <p:nvSpPr>
-          <p:cNvPr id="14" name="Text 12"/>
-          <p:cNvSpPr/>
-          <p:nvPr/>
-        </p:nvSpPr>
-        <p:spPr>
-          <a:xfrm>
-            <a:off x="476250" y="4006155"/>
-            <a:ext cx="2654350" cy="560040"/>
-          </a:xfrm>
-          <a:prstGeom prst="roundRect">
-            <a:avLst>
-              <a:gd name="adj" fmla="val 13606"/>
-            </a:avLst>
-          </a:prstGeom>
-          <a:solidFill>
-            <a:srgbClr val="252538"/>
-          </a:solidFill>
-          <a:ln/>
-        </p:spPr>
-        <p:txBody>
-          <a:bodyPr wrap="square" rtlCol="0" anchor="ctr"/>
-          <a:lstStyle/>
-          <a:p>
-            <a:pPr marL="0" indent="0">
-              <a:buNone/>
-            </a:pPr>
-            <a:endParaRPr lang="en-US" dirty="0"/>
-          </a:p>
-        </p:txBody>
-      </p:sp>
-      <p:sp>
-        <p:nvSpPr>
-          <p:cNvPr id="15" name="Shape 13"/>
-          <p:cNvSpPr/>
-          <p:nvPr/>
-        </p:nvSpPr>
-        <p:spPr>
-          <a:xfrm>
-            <a:off x="490538" y="4006155"/>
-            <a:ext cx="0" cy="560040"/>
-          </a:xfrm>
-          <a:prstGeom prst="line">
-            <a:avLst/>
-          </a:prstGeom>
-          <a:noFill/>
-          <a:ln w="28575">
-            <a:solidFill>
-              <a:srgbClr val="22C55E"/>
-            </a:solidFill>
-            <a:prstDash val="solid"/>
-          </a:ln>
-        </p:spPr>
-        <p:txBody>
-          <a:bodyPr/>
-          <a:lstStyle/>
-          <a:p>
-            <a:endParaRPr lang="it-IT"/>
-          </a:p>
-        </p:txBody>
-      </p:sp>
-      <p:sp>
-        <p:nvSpPr>
-          <p:cNvPr id="16" name="Text 14"/>
-          <p:cNvSpPr/>
-          <p:nvPr/>
-        </p:nvSpPr>
-        <p:spPr>
-          <a:xfrm>
-            <a:off x="619125" y="4120455"/>
-            <a:ext cx="2445118" cy="159990"/>
-          </a:xfrm>
-          <a:prstGeom prst="rect">
-            <a:avLst/>
-          </a:prstGeom>
-          <a:noFill/>
-          <a:ln/>
-        </p:spPr>
-        <p:txBody>
-          <a:bodyPr wrap="square" lIns="0" tIns="0" rIns="0" bIns="0" rtlCol="0" anchor="t"/>
-          <a:lstStyle/>
-          <a:p>
-            <a:pPr marL="0" indent="0" algn="l">
-              <a:lnSpc>
-                <a:spcPts val="1260"/>
-              </a:lnSpc>
-              <a:buNone/>
-            </a:pPr>
-            <a:r>
-              <a:rPr lang="en-US" sz="900" b="1" dirty="0">
-                <a:solidFill>
-                  <a:srgbClr val="22C55E"/>
-                </a:solidFill>
-                <a:latin typeface="Arial" pitchFamily="34" charset="0"/>
-                <a:ea typeface="Arial" pitchFamily="34" charset="-122"/>
-                <a:cs typeface="Arial" pitchFamily="34" charset="-120"/>
-              </a:rPr>
-              <a:t>select! macro</a:t>
-            </a:r>
-            <a:endParaRPr lang="en-US" sz="900" dirty="0"/>
-          </a:p>
-        </p:txBody>
-      </p:sp>
-      <p:sp>
-        <p:nvSpPr>
-          <p:cNvPr id="17" name="Text 15"/>
-          <p:cNvSpPr/>
-          <p:nvPr/>
-        </p:nvSpPr>
-        <p:spPr>
-          <a:xfrm>
-            <a:off x="619125" y="4318546"/>
-            <a:ext cx="2445118" cy="133350"/>
-          </a:xfrm>
-          <a:prstGeom prst="rect">
-            <a:avLst/>
-          </a:prstGeom>
-          <a:noFill/>
-          <a:ln/>
-        </p:spPr>
-        <p:txBody>
-          <a:bodyPr wrap="square" lIns="0" tIns="0" rIns="0" bIns="0" rtlCol="0" anchor="t"/>
-          <a:lstStyle/>
-          <a:p>
-            <a:pPr marL="0" indent="0" algn="l">
-              <a:lnSpc>
-                <a:spcPts val="1050"/>
-              </a:lnSpc>
-              <a:spcBef>
-                <a:spcPts val="300"/>
-              </a:spcBef>
-              <a:buNone/>
-            </a:pPr>
-            <a:r>
-              <a:rPr lang="en-US" sz="750" dirty="0">
-                <a:solidFill>
-                  <a:srgbClr val="8B8BA0"/>
-                </a:solidFill>
-                <a:latin typeface="Arial" pitchFamily="34" charset="0"/>
-                <a:ea typeface="Arial" pitchFamily="34" charset="-122"/>
-                <a:cs typeface="Arial" pitchFamily="34" charset="-120"/>
-              </a:rPr>
-              <a:t>Primo task a completare vince</a:t>
-            </a:r>
-            <a:endParaRPr lang="en-US" sz="750" dirty="0"/>
-          </a:p>
-        </p:txBody>
-      </p:sp>
-      <p:sp>
-        <p:nvSpPr>
-          <p:cNvPr id="18" name="Text 16"/>
-          <p:cNvSpPr/>
-          <p:nvPr/>
-        </p:nvSpPr>
-        <p:spPr>
-          <a:xfrm>
-            <a:off x="3244900" y="4006155"/>
-            <a:ext cx="2654350" cy="560040"/>
-          </a:xfrm>
-          <a:prstGeom prst="roundRect">
-            <a:avLst>
-              <a:gd name="adj" fmla="val 13606"/>
-            </a:avLst>
-          </a:prstGeom>
-          <a:solidFill>
-            <a:srgbClr val="252538"/>
-          </a:solidFill>
-          <a:ln/>
-        </p:spPr>
-        <p:txBody>
-          <a:bodyPr wrap="square" rtlCol="0" anchor="ctr"/>
-          <a:lstStyle/>
-          <a:p>
-            <a:pPr marL="0" indent="0">
-              <a:buNone/>
-            </a:pPr>
-            <a:endParaRPr lang="en-US" dirty="0"/>
-          </a:p>
-        </p:txBody>
-      </p:sp>
-      <p:sp>
-        <p:nvSpPr>
-          <p:cNvPr id="19" name="Shape 17"/>
-          <p:cNvSpPr/>
-          <p:nvPr/>
-        </p:nvSpPr>
-        <p:spPr>
-          <a:xfrm>
-            <a:off x="3259187" y="4006155"/>
-            <a:ext cx="0" cy="560040"/>
-          </a:xfrm>
-          <a:prstGeom prst="line">
-            <a:avLst/>
-          </a:prstGeom>
-          <a:noFill/>
-          <a:ln w="28575">
-            <a:solidFill>
-              <a:srgbClr val="3B82F6"/>
-            </a:solidFill>
-            <a:prstDash val="solid"/>
-          </a:ln>
-        </p:spPr>
-        <p:txBody>
-          <a:bodyPr/>
-          <a:lstStyle/>
-          <a:p>
-            <a:endParaRPr lang="it-IT"/>
-          </a:p>
-        </p:txBody>
-      </p:sp>
-      <p:sp>
-        <p:nvSpPr>
-          <p:cNvPr id="20" name="Text 18"/>
-          <p:cNvSpPr/>
-          <p:nvPr/>
-        </p:nvSpPr>
-        <p:spPr>
-          <a:xfrm>
-            <a:off x="3387775" y="4120455"/>
-            <a:ext cx="2445118" cy="159990"/>
-          </a:xfrm>
-          <a:prstGeom prst="rect">
-            <a:avLst/>
-          </a:prstGeom>
-          <a:noFill/>
-          <a:ln/>
-        </p:spPr>
-        <p:txBody>
-          <a:bodyPr wrap="square" lIns="0" tIns="0" rIns="0" bIns="0" rtlCol="0" anchor="t"/>
-          <a:lstStyle/>
-          <a:p>
-            <a:pPr marL="0" indent="0" algn="l">
-              <a:lnSpc>
-                <a:spcPts val="1260"/>
-              </a:lnSpc>
-              <a:buNone/>
-            </a:pPr>
-            <a:r>
-              <a:rPr lang="en-US" sz="900" b="1" dirty="0">
-                <a:solidFill>
-                  <a:srgbClr val="3B82F6"/>
-                </a:solidFill>
-                <a:latin typeface="Arial" pitchFamily="34" charset="0"/>
-                <a:ea typeface="Arial" pitchFamily="34" charset="-122"/>
-                <a:cs typeface="Arial" pitchFamily="34" charset="-120"/>
-              </a:rPr>
-              <a:t>watch::channel</a:t>
-            </a:r>
-            <a:endParaRPr lang="en-US" sz="900" dirty="0"/>
-          </a:p>
-        </p:txBody>
-      </p:sp>
-      <p:sp>
-        <p:nvSpPr>
-          <p:cNvPr id="21" name="Text 19"/>
-          <p:cNvSpPr/>
-          <p:nvPr/>
-        </p:nvSpPr>
-        <p:spPr>
-          <a:xfrm>
-            <a:off x="3387775" y="4318546"/>
-            <a:ext cx="2445118" cy="133350"/>
-          </a:xfrm>
-          <a:prstGeom prst="rect">
-            <a:avLst/>
-          </a:prstGeom>
-          <a:noFill/>
-          <a:ln/>
-        </p:spPr>
-        <p:txBody>
-          <a:bodyPr wrap="square" lIns="0" tIns="0" rIns="0" bIns="0" rtlCol="0" anchor="t"/>
-          <a:lstStyle/>
-          <a:p>
-            <a:pPr marL="0" indent="0" algn="l">
-              <a:lnSpc>
-                <a:spcPts val="1050"/>
-              </a:lnSpc>
-              <a:spcBef>
-                <a:spcPts val="300"/>
-              </a:spcBef>
-              <a:buNone/>
-            </a:pPr>
-            <a:r>
-              <a:rPr lang="en-US" sz="750" dirty="0">
-                <a:solidFill>
-                  <a:srgbClr val="8B8BA0"/>
-                </a:solidFill>
-                <a:latin typeface="Arial" pitchFamily="34" charset="0"/>
-                <a:ea typeface="Arial" pitchFamily="34" charset="-122"/>
-                <a:cs typeface="Arial" pitchFamily="34" charset="-120"/>
-              </a:rPr>
-              <a:t>Broadcast stop signal</a:t>
-            </a:r>
-            <a:endParaRPr lang="en-US" sz="750" dirty="0"/>
-          </a:p>
-        </p:txBody>
-      </p:sp>
-      <p:sp>
-        <p:nvSpPr>
-          <p:cNvPr id="22" name="Text 20"/>
-          <p:cNvSpPr/>
-          <p:nvPr/>
-        </p:nvSpPr>
-        <p:spPr>
-          <a:xfrm>
-            <a:off x="6013549" y="4006155"/>
-            <a:ext cx="2654350" cy="560040"/>
-          </a:xfrm>
-          <a:prstGeom prst="roundRect">
-            <a:avLst>
-              <a:gd name="adj" fmla="val 13606"/>
-            </a:avLst>
-          </a:prstGeom>
-          <a:solidFill>
-            <a:srgbClr val="252538"/>
-          </a:solidFill>
-          <a:ln/>
-        </p:spPr>
-        <p:txBody>
-          <a:bodyPr wrap="square" rtlCol="0" anchor="ctr"/>
-          <a:lstStyle/>
-          <a:p>
-            <a:pPr marL="0" indent="0">
-              <a:buNone/>
-            </a:pPr>
-            <a:endParaRPr lang="en-US" dirty="0"/>
-          </a:p>
-        </p:txBody>
-      </p:sp>
-      <p:sp>
-        <p:nvSpPr>
-          <p:cNvPr id="23" name="Shape 21"/>
-          <p:cNvSpPr/>
-          <p:nvPr/>
-        </p:nvSpPr>
-        <p:spPr>
-          <a:xfrm>
-            <a:off x="6027837" y="4006155"/>
-            <a:ext cx="0" cy="560040"/>
-          </a:xfrm>
-          <a:prstGeom prst="line">
-            <a:avLst/>
-          </a:prstGeom>
-          <a:noFill/>
-          <a:ln w="28575">
-            <a:solidFill>
-              <a:srgbClr val="A855F7"/>
-            </a:solidFill>
-            <a:prstDash val="solid"/>
-          </a:ln>
-        </p:spPr>
-        <p:txBody>
-          <a:bodyPr/>
-          <a:lstStyle/>
-          <a:p>
-            <a:endParaRPr lang="it-IT"/>
-          </a:p>
-        </p:txBody>
-      </p:sp>
-      <p:sp>
-        <p:nvSpPr>
-          <p:cNvPr id="24" name="Text 22"/>
-          <p:cNvSpPr/>
-          <p:nvPr/>
-        </p:nvSpPr>
-        <p:spPr>
-          <a:xfrm>
-            <a:off x="6156424" y="4120455"/>
-            <a:ext cx="2445118" cy="159990"/>
-          </a:xfrm>
-          <a:prstGeom prst="rect">
-            <a:avLst/>
-          </a:prstGeom>
-          <a:noFill/>
-          <a:ln/>
-        </p:spPr>
-        <p:txBody>
-          <a:bodyPr wrap="square" lIns="0" tIns="0" rIns="0" bIns="0" rtlCol="0" anchor="t"/>
-          <a:lstStyle/>
-          <a:p>
-            <a:pPr marL="0" indent="0" algn="l">
-              <a:lnSpc>
-                <a:spcPts val="1260"/>
-              </a:lnSpc>
-              <a:buNone/>
-            </a:pPr>
-            <a:r>
-              <a:rPr lang="en-US" sz="900" b="1" dirty="0">
-                <a:solidFill>
-                  <a:srgbClr val="A855F7"/>
-                </a:solidFill>
-                <a:latin typeface="Arial" pitchFamily="34" charset="0"/>
-                <a:ea typeface="Arial" pitchFamily="34" charset="-122"/>
-                <a:cs typeface="Arial" pitchFamily="34" charset="-120"/>
-              </a:rPr>
-              <a:t>mpsc bounded</a:t>
-            </a:r>
-            <a:endParaRPr lang="en-US" sz="900" dirty="0"/>
-          </a:p>
-        </p:txBody>
-      </p:sp>
-      <p:sp>
-        <p:nvSpPr>
-          <p:cNvPr id="25" name="Text 23"/>
-          <p:cNvSpPr/>
-          <p:nvPr/>
-        </p:nvSpPr>
-        <p:spPr>
-          <a:xfrm>
-            <a:off x="6156424" y="4318546"/>
-            <a:ext cx="2445118" cy="133350"/>
-          </a:xfrm>
-          <a:prstGeom prst="rect">
-            <a:avLst/>
-          </a:prstGeom>
-          <a:noFill/>
-          <a:ln/>
-        </p:spPr>
-        <p:txBody>
-          <a:bodyPr wrap="square" lIns="0" tIns="0" rIns="0" bIns="0" rtlCol="0" anchor="t"/>
-          <a:lstStyle/>
-          <a:p>
-            <a:pPr marL="0" indent="0" algn="l">
-              <a:lnSpc>
-                <a:spcPts val="1050"/>
-              </a:lnSpc>
-              <a:spcBef>
-                <a:spcPts val="300"/>
-              </a:spcBef>
-              <a:buNone/>
-            </a:pPr>
-            <a:r>
-              <a:rPr lang="en-US" sz="750" dirty="0">
-                <a:solidFill>
-                  <a:srgbClr val="8B8BA0"/>
-                </a:solidFill>
-                <a:latin typeface="Arial" pitchFamily="34" charset="0"/>
-                <a:ea typeface="Arial" pitchFamily="34" charset="-122"/>
-                <a:cs typeface="Arial" pitchFamily="34" charset="-120"/>
-              </a:rPr>
-              <a:t>Backpressure 1024 msg</a:t>
-            </a:r>
-            <a:endParaRPr lang="en-US" sz="750" dirty="0"/>
-          </a:p>
-        </p:txBody>
-      </p:sp>
-    </p:spTree>
-  </p:cSld>
-  <p:clrMapOvr>
-    <a:masterClrMapping/>
-  </p:clrMapOvr>
-</p:sld>
-</file>
-
-<file path=ppt/slides/slide13.xml><?xml version="1.0" encoding="utf-8"?>
-<p:sld xmlns:a="http://schemas.openxmlformats.org/drawingml/2006/main" xmlns:r="http://schemas.openxmlformats.org/officeDocument/2006/relationships" xmlns:p="http://schemas.openxmlformats.org/presentationml/2006/main">
   <p:cSld name="Slide 5">
     <p:bg>
       <p:bgPr>
@@ -8060,1344 +6682,7 @@
 </p:sld>
 </file>
 
-<file path=ppt/slides/slide14.xml><?xml version="1.0" encoding="utf-8"?>
-<p:sld xmlns:a="http://schemas.openxmlformats.org/drawingml/2006/main" xmlns:r="http://schemas.openxmlformats.org/officeDocument/2006/relationships" xmlns:p="http://schemas.openxmlformats.org/presentationml/2006/main">
-  <p:cSld name="Slide 10">
-    <p:bg>
-      <p:bgPr>
-        <a:solidFill>
-          <a:srgbClr val="1A1A2E"/>
-        </a:solidFill>
-        <a:effectLst/>
-      </p:bgPr>
-    </p:bg>
-    <p:spTree>
-      <p:nvGrpSpPr>
-        <p:cNvPr id="1" name=""/>
-        <p:cNvGrpSpPr/>
-        <p:nvPr/>
-      </p:nvGrpSpPr>
-      <p:grpSpPr>
-        <a:xfrm>
-          <a:off x="0" y="0"/>
-          <a:ext cx="0" cy="0"/>
-          <a:chOff x="0" y="0"/>
-          <a:chExt cx="0" cy="0"/>
-        </a:xfrm>
-      </p:grpSpPr>
-      <p:sp>
-        <p:nvSpPr>
-          <p:cNvPr id="2" name="Text 0"/>
-          <p:cNvSpPr/>
-          <p:nvPr/>
-        </p:nvSpPr>
-        <p:spPr>
-          <a:xfrm>
-            <a:off x="0" y="0"/>
-            <a:ext cx="76200" cy="5143500"/>
-          </a:xfrm>
-          <a:prstGeom prst="rect">
-            <a:avLst/>
-          </a:prstGeom>
-          <a:solidFill>
-            <a:srgbClr val="F97316"/>
-          </a:solidFill>
-          <a:ln/>
-        </p:spPr>
-        <p:txBody>
-          <a:bodyPr wrap="square" rtlCol="0" anchor="ctr"/>
-          <a:lstStyle/>
-          <a:p>
-            <a:pPr marL="0" indent="0">
-              <a:buNone/>
-            </a:pPr>
-            <a:endParaRPr lang="en-US" dirty="0"/>
-          </a:p>
-        </p:txBody>
-      </p:sp>
-      <p:sp>
-        <p:nvSpPr>
-          <p:cNvPr id="3" name="Text 1"/>
-          <p:cNvSpPr/>
-          <p:nvPr/>
-        </p:nvSpPr>
-        <p:spPr>
-          <a:xfrm>
-            <a:off x="571500" y="266700"/>
-            <a:ext cx="4187381" cy="285750"/>
-          </a:xfrm>
-          <a:prstGeom prst="rect">
-            <a:avLst/>
-          </a:prstGeom>
-          <a:noFill/>
-          <a:ln/>
-        </p:spPr>
-        <p:txBody>
-          <a:bodyPr wrap="square" lIns="0" tIns="0" rIns="0" bIns="0" rtlCol="0" anchor="t"/>
-          <a:lstStyle/>
-          <a:p>
-            <a:pPr marL="0" indent="0" algn="l">
-              <a:lnSpc>
-                <a:spcPts val="2250"/>
-              </a:lnSpc>
-              <a:buNone/>
-            </a:pPr>
-            <a:r>
-              <a:rPr lang="en-US" sz="2250" b="1" dirty="0">
-                <a:solidFill>
-                  <a:srgbClr val="FFFFFF"/>
-                </a:solidFill>
-                <a:latin typeface="Arial" pitchFamily="34" charset="0"/>
-                <a:ea typeface="Arial" pitchFamily="34" charset="-122"/>
-                <a:cs typeface="Arial" pitchFamily="34" charset="-120"/>
-              </a:rPr>
-              <a:t>Codice: Broadcast</a:t>
-            </a:r>
-            <a:endParaRPr lang="en-US" sz="2250" dirty="0"/>
-          </a:p>
-        </p:txBody>
-      </p:sp>
-      <p:sp>
-        <p:nvSpPr>
-          <p:cNvPr id="4" name="Text 2"/>
-          <p:cNvSpPr/>
-          <p:nvPr/>
-        </p:nvSpPr>
-        <p:spPr>
-          <a:xfrm>
-            <a:off x="476250" y="1291530"/>
-            <a:ext cx="4080510" cy="159990"/>
-          </a:xfrm>
-          <a:prstGeom prst="rect">
-            <a:avLst/>
-          </a:prstGeom>
-          <a:noFill/>
-          <a:ln/>
-        </p:spPr>
-        <p:txBody>
-          <a:bodyPr wrap="square" lIns="0" tIns="0" rIns="0" bIns="0" rtlCol="0" anchor="t"/>
-          <a:lstStyle/>
-          <a:p>
-            <a:pPr marL="0" indent="0" algn="l">
-              <a:lnSpc>
-                <a:spcPts val="1260"/>
-              </a:lnSpc>
-              <a:buNone/>
-            </a:pPr>
-            <a:r>
-              <a:rPr lang="en-US" sz="900" b="1" dirty="0">
-                <a:solidFill>
-                  <a:srgbClr val="F97316"/>
-                </a:solidFill>
-                <a:latin typeface="Arial" pitchFamily="34" charset="0"/>
-                <a:ea typeface="Arial" pitchFamily="34" charset="-122"/>
-                <a:cs typeface="Arial" pitchFamily="34" charset="-120"/>
-              </a:rPr>
-              <a:t>Double-checked locking</a:t>
-            </a:r>
-            <a:endParaRPr lang="en-US" sz="900" dirty="0"/>
-          </a:p>
-        </p:txBody>
-      </p:sp>
-      <p:sp>
-        <p:nvSpPr>
-          <p:cNvPr id="5" name="Text 3"/>
-          <p:cNvSpPr/>
-          <p:nvPr/>
-        </p:nvSpPr>
-        <p:spPr>
-          <a:xfrm>
-            <a:off x="476250" y="1546771"/>
-            <a:ext cx="4000500" cy="2686050"/>
-          </a:xfrm>
-          <a:prstGeom prst="roundRect">
-            <a:avLst>
-              <a:gd name="adj" fmla="val 3546"/>
-            </a:avLst>
-          </a:prstGeom>
-          <a:solidFill>
-            <a:srgbClr val="0D0D1A"/>
-          </a:solidFill>
-          <a:ln w="9525">
-            <a:solidFill>
-              <a:srgbClr val="3D3D56"/>
-            </a:solidFill>
-          </a:ln>
-        </p:spPr>
-        <p:txBody>
-          <a:bodyPr wrap="square" rtlCol="0" anchor="ctr"/>
-          <a:lstStyle/>
-          <a:p>
-            <a:pPr marL="0" indent="0">
-              <a:buNone/>
-            </a:pPr>
-            <a:endParaRPr lang="en-US" dirty="0"/>
-          </a:p>
-        </p:txBody>
-      </p:sp>
-      <p:sp>
-        <p:nvSpPr>
-          <p:cNvPr id="6" name="Text 4"/>
-          <p:cNvSpPr/>
-          <p:nvPr/>
-        </p:nvSpPr>
-        <p:spPr>
-          <a:xfrm>
-            <a:off x="619125" y="1689646"/>
-            <a:ext cx="3789045" cy="266700"/>
-          </a:xfrm>
-          <a:prstGeom prst="rect">
-            <a:avLst/>
-          </a:prstGeom>
-          <a:noFill/>
-          <a:ln/>
-        </p:spPr>
-        <p:txBody>
-          <a:bodyPr wrap="square" lIns="0" tIns="0" rIns="0" bIns="0" rtlCol="0" anchor="t"/>
-          <a:lstStyle/>
-          <a:p>
-            <a:pPr marL="0" indent="0" algn="l">
-              <a:lnSpc>
-                <a:spcPts val="2100"/>
-              </a:lnSpc>
-              <a:buNone/>
-            </a:pPr>
-            <a:r>
-              <a:rPr lang="en-US" sz="1500" dirty="0">
-                <a:solidFill>
-                  <a:srgbClr val="8B8BA0"/>
-                </a:solidFill>
-                <a:latin typeface="Arial" pitchFamily="34" charset="0"/>
-                <a:ea typeface="Arial" pitchFamily="34" charset="-122"/>
-                <a:cs typeface="Arial" pitchFamily="34" charset="-120"/>
-              </a:rPr>
-              <a:t>// Fast path</a:t>
-            </a:r>
-            <a:endParaRPr lang="en-US" sz="1500" dirty="0"/>
-          </a:p>
-        </p:txBody>
-      </p:sp>
-      <p:sp>
-        <p:nvSpPr>
-          <p:cNvPr id="7" name="Text 5"/>
-          <p:cNvSpPr/>
-          <p:nvPr/>
-        </p:nvSpPr>
-        <p:spPr>
-          <a:xfrm>
-            <a:off x="619125" y="1956346"/>
-            <a:ext cx="3789045" cy="266700"/>
-          </a:xfrm>
-          <a:prstGeom prst="rect">
-            <a:avLst/>
-          </a:prstGeom>
-          <a:noFill/>
-          <a:ln/>
-        </p:spPr>
-        <p:txBody>
-          <a:bodyPr wrap="square" lIns="0" tIns="0" rIns="0" bIns="0" rtlCol="0" anchor="t"/>
-          <a:lstStyle/>
-          <a:p>
-            <a:pPr marL="0" indent="0" algn="l">
-              <a:lnSpc>
-                <a:spcPts val="2100"/>
-              </a:lnSpc>
-              <a:buNone/>
-            </a:pPr>
-            <a:r>
-              <a:rPr lang="en-US" sz="1500" dirty="0">
-                <a:solidFill>
-                  <a:srgbClr val="B8B8D0"/>
-                </a:solidFill>
-                <a:latin typeface="Arial" pitchFamily="34" charset="0"/>
-                <a:ea typeface="Arial" pitchFamily="34" charset="-122"/>
-                <a:cs typeface="Arial" pitchFamily="34" charset="-120"/>
-              </a:rPr>
-              <a:t>channels.</a:t>
-            </a:r>
-            <a:r>
-              <a:rPr lang="en-US" sz="1500" dirty="0">
-                <a:solidFill>
-                  <a:srgbClr val="3B82F6"/>
-                </a:solidFill>
-                <a:latin typeface="Arial" pitchFamily="34" charset="0"/>
-                <a:ea typeface="Arial" pitchFamily="34" charset="-122"/>
-                <a:cs typeface="Arial" pitchFamily="34" charset="-120"/>
-              </a:rPr>
-              <a:t>read</a:t>
-            </a:r>
-            <a:r>
-              <a:rPr lang="en-US" sz="1500" dirty="0">
-                <a:solidFill>
-                  <a:srgbClr val="B8B8D0"/>
-                </a:solidFill>
-                <a:latin typeface="Arial" pitchFamily="34" charset="0"/>
-                <a:ea typeface="Arial" pitchFamily="34" charset="-122"/>
-                <a:cs typeface="Arial" pitchFamily="34" charset="-120"/>
-              </a:rPr>
-              <a:t>().</a:t>
-            </a:r>
-            <a:r>
-              <a:rPr lang="en-US" sz="1500" dirty="0">
-                <a:solidFill>
-                  <a:srgbClr val="F97316"/>
-                </a:solidFill>
-                <a:latin typeface="Arial" pitchFamily="34" charset="0"/>
-                <a:ea typeface="Arial" pitchFamily="34" charset="-122"/>
-                <a:cs typeface="Arial" pitchFamily="34" charset="-120"/>
-              </a:rPr>
-              <a:t>await</a:t>
-            </a:r>
-            <a:endParaRPr lang="en-US" sz="1500" dirty="0"/>
-          </a:p>
-        </p:txBody>
-      </p:sp>
-      <p:sp>
-        <p:nvSpPr>
-          <p:cNvPr id="8" name="Text 6"/>
-          <p:cNvSpPr/>
-          <p:nvPr/>
-        </p:nvSpPr>
-        <p:spPr>
-          <a:xfrm>
-            <a:off x="619125" y="2223046"/>
-            <a:ext cx="3789045" cy="266700"/>
-          </a:xfrm>
-          <a:prstGeom prst="rect">
-            <a:avLst/>
-          </a:prstGeom>
-          <a:noFill/>
-          <a:ln/>
-        </p:spPr>
-        <p:txBody>
-          <a:bodyPr wrap="square" lIns="0" tIns="0" rIns="0" bIns="0" rtlCol="0" anchor="t"/>
-          <a:lstStyle/>
-          <a:p>
-            <a:pPr marL="0" indent="0" algn="l">
-              <a:lnSpc>
-                <a:spcPts val="2100"/>
-              </a:lnSpc>
-              <a:buNone/>
-            </a:pPr>
-            <a:r>
-              <a:rPr lang="en-US" sz="1500" dirty="0">
-                <a:solidFill>
-                  <a:srgbClr val="F97316"/>
-                </a:solidFill>
-                <a:latin typeface="Arial" pitchFamily="34" charset="0"/>
-                <a:ea typeface="Arial" pitchFamily="34" charset="-122"/>
-                <a:cs typeface="Arial" pitchFamily="34" charset="-120"/>
-              </a:rPr>
-              <a:t>if let</a:t>
-            </a:r>
-            <a:r>
-              <a:rPr lang="en-US" sz="1500" dirty="0">
-                <a:solidFill>
-                  <a:srgbClr val="B8B8D0"/>
-                </a:solidFill>
-                <a:latin typeface="Arial" pitchFamily="34" charset="0"/>
-                <a:ea typeface="Arial" pitchFamily="34" charset="-122"/>
-                <a:cs typeface="Arial" pitchFamily="34" charset="-120"/>
-              </a:rPr>
-              <a:t> Some(tx) = get(&amp;id)</a:t>
-            </a:r>
-            <a:endParaRPr lang="en-US" sz="1500" dirty="0"/>
-          </a:p>
-        </p:txBody>
-      </p:sp>
-      <p:sp>
-        <p:nvSpPr>
-          <p:cNvPr id="9" name="Text 7"/>
-          <p:cNvSpPr/>
-          <p:nvPr/>
-        </p:nvSpPr>
-        <p:spPr>
-          <a:xfrm>
-            <a:off x="619125" y="2489746"/>
-            <a:ext cx="3789045" cy="266700"/>
-          </a:xfrm>
-          <a:prstGeom prst="rect">
-            <a:avLst/>
-          </a:prstGeom>
-          <a:noFill/>
-          <a:ln/>
-        </p:spPr>
-        <p:txBody>
-          <a:bodyPr wrap="square" lIns="152400" tIns="0" rIns="0" bIns="0" rtlCol="0" anchor="t"/>
-          <a:lstStyle/>
-          <a:p>
-            <a:pPr marL="0" indent="0" algn="l">
-              <a:lnSpc>
-                <a:spcPts val="2100"/>
-              </a:lnSpc>
-              <a:buNone/>
-            </a:pPr>
-            <a:r>
-              <a:rPr lang="en-US" sz="1500" dirty="0">
-                <a:solidFill>
-                  <a:srgbClr val="F97316"/>
-                </a:solidFill>
-                <a:latin typeface="Arial" pitchFamily="34" charset="0"/>
-                <a:ea typeface="Arial" pitchFamily="34" charset="-122"/>
-                <a:cs typeface="Arial" pitchFamily="34" charset="-120"/>
-              </a:rPr>
-              <a:t>return</a:t>
-            </a:r>
-            <a:r>
-              <a:rPr lang="en-US" sz="1500" dirty="0">
-                <a:solidFill>
-                  <a:srgbClr val="B8B8D0"/>
-                </a:solidFill>
-                <a:latin typeface="Arial" pitchFamily="34" charset="0"/>
-                <a:ea typeface="Arial" pitchFamily="34" charset="-122"/>
-                <a:cs typeface="Arial" pitchFamily="34" charset="-120"/>
-              </a:rPr>
-              <a:t> tx.clone()</a:t>
-            </a:r>
-            <a:endParaRPr lang="en-US" sz="1500" dirty="0"/>
-          </a:p>
-        </p:txBody>
-      </p:sp>
-      <p:sp>
-        <p:nvSpPr>
-          <p:cNvPr id="10" name="Text 8"/>
-          <p:cNvSpPr/>
-          <p:nvPr/>
-        </p:nvSpPr>
-        <p:spPr>
-          <a:xfrm>
-            <a:off x="619125" y="2756446"/>
-            <a:ext cx="3789045" cy="266700"/>
-          </a:xfrm>
-          <a:prstGeom prst="rect">
-            <a:avLst/>
-          </a:prstGeom>
-          <a:noFill/>
-          <a:ln/>
-        </p:spPr>
-        <p:txBody>
-          <a:bodyPr wrap="square" lIns="0" tIns="0" rIns="0" bIns="0" rtlCol="0" anchor="t"/>
-          <a:lstStyle/>
-          <a:p>
-            <a:pPr marL="0" indent="0" algn="l">
-              <a:lnSpc>
-                <a:spcPts val="2100"/>
-              </a:lnSpc>
-              <a:buNone/>
-            </a:pPr>
-            <a:r>
-              <a:rPr lang="en-US" sz="1500" dirty="0">
-                <a:solidFill>
-                  <a:srgbClr val="8B8BA0"/>
-                </a:solidFill>
-                <a:latin typeface="Arial" pitchFamily="34" charset="0"/>
-                <a:ea typeface="Arial" pitchFamily="34" charset="-122"/>
-                <a:cs typeface="Arial" pitchFamily="34" charset="-120"/>
-              </a:rPr>
-              <a:t>// Slow path</a:t>
-            </a:r>
-            <a:endParaRPr lang="en-US" sz="1500" dirty="0"/>
-          </a:p>
-        </p:txBody>
-      </p:sp>
-      <p:sp>
-        <p:nvSpPr>
-          <p:cNvPr id="11" name="Text 9"/>
-          <p:cNvSpPr/>
-          <p:nvPr/>
-        </p:nvSpPr>
-        <p:spPr>
-          <a:xfrm>
-            <a:off x="619125" y="3023146"/>
-            <a:ext cx="3789045" cy="266700"/>
-          </a:xfrm>
-          <a:prstGeom prst="rect">
-            <a:avLst/>
-          </a:prstGeom>
-          <a:noFill/>
-          <a:ln/>
-        </p:spPr>
-        <p:txBody>
-          <a:bodyPr wrap="square" lIns="0" tIns="0" rIns="0" bIns="0" rtlCol="0" anchor="t"/>
-          <a:lstStyle/>
-          <a:p>
-            <a:pPr marL="0" indent="0" algn="l">
-              <a:lnSpc>
-                <a:spcPts val="2100"/>
-              </a:lnSpc>
-              <a:buNone/>
-            </a:pPr>
-            <a:r>
-              <a:rPr lang="en-US" sz="1500" dirty="0">
-                <a:solidFill>
-                  <a:srgbClr val="B8B8D0"/>
-                </a:solidFill>
-                <a:latin typeface="Arial" pitchFamily="34" charset="0"/>
-                <a:ea typeface="Arial" pitchFamily="34" charset="-122"/>
-                <a:cs typeface="Arial" pitchFamily="34" charset="-120"/>
-              </a:rPr>
-              <a:t>channels.</a:t>
-            </a:r>
-            <a:r>
-              <a:rPr lang="en-US" sz="1500" dirty="0">
-                <a:solidFill>
-                  <a:srgbClr val="3B82F6"/>
-                </a:solidFill>
-                <a:latin typeface="Arial" pitchFamily="34" charset="0"/>
-                <a:ea typeface="Arial" pitchFamily="34" charset="-122"/>
-                <a:cs typeface="Arial" pitchFamily="34" charset="-120"/>
-              </a:rPr>
-              <a:t>write</a:t>
-            </a:r>
-            <a:r>
-              <a:rPr lang="en-US" sz="1500" dirty="0">
-                <a:solidFill>
-                  <a:srgbClr val="B8B8D0"/>
-                </a:solidFill>
-                <a:latin typeface="Arial" pitchFamily="34" charset="0"/>
-                <a:ea typeface="Arial" pitchFamily="34" charset="-122"/>
-                <a:cs typeface="Arial" pitchFamily="34" charset="-120"/>
-              </a:rPr>
-              <a:t>().</a:t>
-            </a:r>
-            <a:r>
-              <a:rPr lang="en-US" sz="1500" dirty="0">
-                <a:solidFill>
-                  <a:srgbClr val="F97316"/>
-                </a:solidFill>
-                <a:latin typeface="Arial" pitchFamily="34" charset="0"/>
-                <a:ea typeface="Arial" pitchFamily="34" charset="-122"/>
-                <a:cs typeface="Arial" pitchFamily="34" charset="-120"/>
-              </a:rPr>
-              <a:t>await</a:t>
-            </a:r>
-            <a:endParaRPr lang="en-US" sz="1500" dirty="0"/>
-          </a:p>
-        </p:txBody>
-      </p:sp>
-      <p:sp>
-        <p:nvSpPr>
-          <p:cNvPr id="12" name="Text 10"/>
-          <p:cNvSpPr/>
-          <p:nvPr/>
-        </p:nvSpPr>
-        <p:spPr>
-          <a:xfrm>
-            <a:off x="619125" y="3289846"/>
-            <a:ext cx="3789045" cy="266700"/>
-          </a:xfrm>
-          <a:prstGeom prst="rect">
-            <a:avLst/>
-          </a:prstGeom>
-          <a:noFill/>
-          <a:ln/>
-        </p:spPr>
-        <p:txBody>
-          <a:bodyPr wrap="square" lIns="0" tIns="0" rIns="0" bIns="0" rtlCol="0" anchor="t"/>
-          <a:lstStyle/>
-          <a:p>
-            <a:pPr marL="0" indent="0" algn="l">
-              <a:lnSpc>
-                <a:spcPts val="2100"/>
-              </a:lnSpc>
-              <a:buNone/>
-            </a:pPr>
-            <a:r>
-              <a:rPr lang="en-US" sz="1500" dirty="0">
-                <a:solidFill>
-                  <a:srgbClr val="B8B8D0"/>
-                </a:solidFill>
-                <a:latin typeface="Arial" pitchFamily="34" charset="0"/>
-                <a:ea typeface="Arial" pitchFamily="34" charset="-122"/>
-                <a:cs typeface="Arial" pitchFamily="34" charset="-120"/>
-              </a:rPr>
-              <a:t>.entry(id).or_insert(</a:t>
-            </a:r>
-            <a:endParaRPr lang="en-US" sz="1500" dirty="0"/>
-          </a:p>
-        </p:txBody>
-      </p:sp>
-      <p:sp>
-        <p:nvSpPr>
-          <p:cNvPr id="13" name="Text 11"/>
-          <p:cNvSpPr/>
-          <p:nvPr/>
-        </p:nvSpPr>
-        <p:spPr>
-          <a:xfrm>
-            <a:off x="619125" y="3556546"/>
-            <a:ext cx="3789045" cy="266700"/>
-          </a:xfrm>
-          <a:prstGeom prst="rect">
-            <a:avLst/>
-          </a:prstGeom>
-          <a:noFill/>
-          <a:ln/>
-        </p:spPr>
-        <p:txBody>
-          <a:bodyPr wrap="square" lIns="152400" tIns="0" rIns="0" bIns="0" rtlCol="0" anchor="t"/>
-          <a:lstStyle/>
-          <a:p>
-            <a:pPr marL="0" indent="0" algn="l">
-              <a:lnSpc>
-                <a:spcPts val="2100"/>
-              </a:lnSpc>
-              <a:buNone/>
-            </a:pPr>
-            <a:r>
-              <a:rPr lang="en-US" sz="1500" dirty="0">
-                <a:solidFill>
-                  <a:srgbClr val="A855F7"/>
-                </a:solidFill>
-                <a:latin typeface="Arial" pitchFamily="34" charset="0"/>
-                <a:ea typeface="Arial" pitchFamily="34" charset="-122"/>
-                <a:cs typeface="Arial" pitchFamily="34" charset="-120"/>
-              </a:rPr>
-              <a:t>broadcast::channel</a:t>
-            </a:r>
-            <a:r>
-              <a:rPr lang="en-US" sz="1500" dirty="0">
-                <a:solidFill>
-                  <a:srgbClr val="B8B8D0"/>
-                </a:solidFill>
-                <a:latin typeface="Arial" pitchFamily="34" charset="0"/>
-                <a:ea typeface="Arial" pitchFamily="34" charset="-122"/>
-                <a:cs typeface="Arial" pitchFamily="34" charset="-120"/>
-              </a:rPr>
-              <a:t>(</a:t>
-            </a:r>
-            <a:r>
-              <a:rPr lang="en-US" sz="1500" dirty="0">
-                <a:solidFill>
-                  <a:srgbClr val="EAB308"/>
-                </a:solidFill>
-                <a:latin typeface="Arial" pitchFamily="34" charset="0"/>
-                <a:ea typeface="Arial" pitchFamily="34" charset="-122"/>
-                <a:cs typeface="Arial" pitchFamily="34" charset="-120"/>
-              </a:rPr>
-              <a:t>1024</a:t>
-            </a:r>
-            <a:r>
-              <a:rPr lang="en-US" sz="1500" dirty="0">
-                <a:solidFill>
-                  <a:srgbClr val="B8B8D0"/>
-                </a:solidFill>
-                <a:latin typeface="Arial" pitchFamily="34" charset="0"/>
-                <a:ea typeface="Arial" pitchFamily="34" charset="-122"/>
-                <a:cs typeface="Arial" pitchFamily="34" charset="-120"/>
-              </a:rPr>
-              <a:t>)</a:t>
-            </a:r>
-            <a:endParaRPr lang="en-US" sz="1500" dirty="0"/>
-          </a:p>
-        </p:txBody>
-      </p:sp>
-      <p:sp>
-        <p:nvSpPr>
-          <p:cNvPr id="14" name="Text 12"/>
-          <p:cNvSpPr/>
-          <p:nvPr/>
-        </p:nvSpPr>
-        <p:spPr>
-          <a:xfrm>
-            <a:off x="619125" y="3823246"/>
-            <a:ext cx="3789045" cy="266700"/>
-          </a:xfrm>
-          <a:prstGeom prst="rect">
-            <a:avLst/>
-          </a:prstGeom>
-          <a:noFill/>
-          <a:ln/>
-        </p:spPr>
-        <p:txBody>
-          <a:bodyPr wrap="square" lIns="0" tIns="0" rIns="0" bIns="0" rtlCol="0" anchor="t"/>
-          <a:lstStyle/>
-          <a:p>
-            <a:pPr marL="0" indent="0" algn="l">
-              <a:lnSpc>
-                <a:spcPts val="2100"/>
-              </a:lnSpc>
-              <a:buNone/>
-            </a:pPr>
-            <a:r>
-              <a:rPr lang="en-US" sz="1500" dirty="0">
-                <a:solidFill>
-                  <a:srgbClr val="B8B8D0"/>
-                </a:solidFill>
-                <a:latin typeface="Arial" pitchFamily="34" charset="0"/>
-                <a:ea typeface="Arial" pitchFamily="34" charset="-122"/>
-                <a:cs typeface="Arial" pitchFamily="34" charset="-120"/>
-              </a:rPr>
-              <a:t>)</a:t>
-            </a:r>
-            <a:endParaRPr lang="en-US" sz="1500" dirty="0"/>
-          </a:p>
-        </p:txBody>
-      </p:sp>
-      <p:sp>
-        <p:nvSpPr>
-          <p:cNvPr id="15" name="Text 13"/>
-          <p:cNvSpPr/>
-          <p:nvPr/>
-        </p:nvSpPr>
-        <p:spPr>
-          <a:xfrm>
-            <a:off x="4667250" y="1158180"/>
-            <a:ext cx="4080510" cy="159990"/>
-          </a:xfrm>
-          <a:prstGeom prst="rect">
-            <a:avLst/>
-          </a:prstGeom>
-          <a:noFill/>
-          <a:ln/>
-        </p:spPr>
-        <p:txBody>
-          <a:bodyPr wrap="square" lIns="0" tIns="0" rIns="0" bIns="0" rtlCol="0" anchor="t"/>
-          <a:lstStyle/>
-          <a:p>
-            <a:pPr marL="0" indent="0" algn="l">
-              <a:lnSpc>
-                <a:spcPts val="1260"/>
-              </a:lnSpc>
-              <a:buNone/>
-            </a:pPr>
-            <a:r>
-              <a:rPr lang="en-US" sz="900" b="1" dirty="0">
-                <a:solidFill>
-                  <a:srgbClr val="3B82F6"/>
-                </a:solidFill>
-                <a:latin typeface="Arial" pitchFamily="34" charset="0"/>
-                <a:ea typeface="Arial" pitchFamily="34" charset="-122"/>
-                <a:cs typeface="Arial" pitchFamily="34" charset="-120"/>
-              </a:rPr>
-              <a:t>broadcast_to_conversation</a:t>
-            </a:r>
-            <a:endParaRPr lang="en-US" sz="900" dirty="0"/>
-          </a:p>
-        </p:txBody>
-      </p:sp>
-      <p:sp>
-        <p:nvSpPr>
-          <p:cNvPr id="16" name="Text 14"/>
-          <p:cNvSpPr/>
-          <p:nvPr/>
-        </p:nvSpPr>
-        <p:spPr>
-          <a:xfrm>
-            <a:off x="4667250" y="1413421"/>
-            <a:ext cx="4000500" cy="2952750"/>
-          </a:xfrm>
-          <a:prstGeom prst="roundRect">
-            <a:avLst>
-              <a:gd name="adj" fmla="val 3226"/>
-            </a:avLst>
-          </a:prstGeom>
-          <a:solidFill>
-            <a:srgbClr val="0D0D1A"/>
-          </a:solidFill>
-          <a:ln w="9525">
-            <a:solidFill>
-              <a:srgbClr val="3D3D56"/>
-            </a:solidFill>
-          </a:ln>
-        </p:spPr>
-        <p:txBody>
-          <a:bodyPr wrap="square" rtlCol="0" anchor="ctr"/>
-          <a:lstStyle/>
-          <a:p>
-            <a:pPr marL="0" indent="0">
-              <a:buNone/>
-            </a:pPr>
-            <a:endParaRPr lang="en-US" dirty="0"/>
-          </a:p>
-        </p:txBody>
-      </p:sp>
-      <p:sp>
-        <p:nvSpPr>
-          <p:cNvPr id="17" name="Text 15"/>
-          <p:cNvSpPr/>
-          <p:nvPr/>
-        </p:nvSpPr>
-        <p:spPr>
-          <a:xfrm>
-            <a:off x="4810125" y="1556296"/>
-            <a:ext cx="3789045" cy="266700"/>
-          </a:xfrm>
-          <a:prstGeom prst="rect">
-            <a:avLst/>
-          </a:prstGeom>
-          <a:noFill/>
-          <a:ln/>
-        </p:spPr>
-        <p:txBody>
-          <a:bodyPr wrap="square" lIns="0" tIns="0" rIns="0" bIns="0" rtlCol="0" anchor="t"/>
-          <a:lstStyle/>
-          <a:p>
-            <a:pPr marL="0" indent="0" algn="l">
-              <a:lnSpc>
-                <a:spcPts val="2100"/>
-              </a:lnSpc>
-              <a:buNone/>
-            </a:pPr>
-            <a:r>
-              <a:rPr lang="en-US" sz="1500" dirty="0">
-                <a:solidFill>
-                  <a:srgbClr val="F97316"/>
-                </a:solidFill>
-                <a:latin typeface="Arial" pitchFamily="34" charset="0"/>
-                <a:ea typeface="Arial" pitchFamily="34" charset="-122"/>
-                <a:cs typeface="Arial" pitchFamily="34" charset="-120"/>
-              </a:rPr>
-              <a:t>match</a:t>
-            </a:r>
-            <a:r>
-              <a:rPr lang="en-US" sz="1500" dirty="0">
-                <a:solidFill>
-                  <a:srgbClr val="B8B8D0"/>
-                </a:solidFill>
-                <a:latin typeface="Arial" pitchFamily="34" charset="0"/>
-                <a:ea typeface="Arial" pitchFamily="34" charset="-122"/>
-                <a:cs typeface="Arial" pitchFamily="34" charset="-120"/>
-              </a:rPr>
-              <a:t> tx.</a:t>
-            </a:r>
-            <a:r>
-              <a:rPr lang="en-US" sz="1500" dirty="0">
-                <a:solidFill>
-                  <a:srgbClr val="3B82F6"/>
-                </a:solidFill>
-                <a:latin typeface="Arial" pitchFamily="34" charset="0"/>
-                <a:ea typeface="Arial" pitchFamily="34" charset="-122"/>
-                <a:cs typeface="Arial" pitchFamily="34" charset="-120"/>
-              </a:rPr>
-              <a:t>send</a:t>
-            </a:r>
-            <a:r>
-              <a:rPr lang="en-US" sz="1500" dirty="0">
-                <a:solidFill>
-                  <a:srgbClr val="B8B8D0"/>
-                </a:solidFill>
-                <a:latin typeface="Arial" pitchFamily="34" charset="0"/>
-                <a:ea typeface="Arial" pitchFamily="34" charset="-122"/>
-                <a:cs typeface="Arial" pitchFamily="34" charset="-120"/>
-              </a:rPr>
-              <a:t>(payload) {</a:t>
-            </a:r>
-            <a:endParaRPr lang="en-US" sz="1500" dirty="0"/>
-          </a:p>
-        </p:txBody>
-      </p:sp>
-      <p:sp>
-        <p:nvSpPr>
-          <p:cNvPr id="18" name="Text 16"/>
-          <p:cNvSpPr/>
-          <p:nvPr/>
-        </p:nvSpPr>
-        <p:spPr>
-          <a:xfrm>
-            <a:off x="4810125" y="1822996"/>
-            <a:ext cx="3789045" cy="266700"/>
-          </a:xfrm>
-          <a:prstGeom prst="rect">
-            <a:avLst/>
-          </a:prstGeom>
-          <a:noFill/>
-          <a:ln/>
-        </p:spPr>
-        <p:txBody>
-          <a:bodyPr wrap="square" lIns="152400" tIns="0" rIns="0" bIns="0" rtlCol="0" anchor="t"/>
-          <a:lstStyle/>
-          <a:p>
-            <a:pPr marL="0" indent="0" algn="l">
-              <a:lnSpc>
-                <a:spcPts val="2100"/>
-              </a:lnSpc>
-              <a:buNone/>
-            </a:pPr>
-            <a:r>
-              <a:rPr lang="en-US" sz="1500" dirty="0">
-                <a:solidFill>
-                  <a:srgbClr val="22C55E"/>
-                </a:solidFill>
-                <a:latin typeface="Arial" pitchFamily="34" charset="0"/>
-                <a:ea typeface="Arial" pitchFamily="34" charset="-122"/>
-                <a:cs typeface="Arial" pitchFamily="34" charset="-120"/>
-              </a:rPr>
-              <a:t>Ok</a:t>
-            </a:r>
-            <a:r>
-              <a:rPr lang="en-US" sz="1500" dirty="0">
-                <a:solidFill>
-                  <a:srgbClr val="B8B8D0"/>
-                </a:solidFill>
-                <a:latin typeface="Arial" pitchFamily="34" charset="0"/>
-                <a:ea typeface="Arial" pitchFamily="34" charset="-122"/>
-                <a:cs typeface="Arial" pitchFamily="34" charset="-120"/>
-              </a:rPr>
-              <a:t>(n) =&gt; {</a:t>
-            </a:r>
-            <a:endParaRPr lang="en-US" sz="1500" dirty="0"/>
-          </a:p>
-        </p:txBody>
-      </p:sp>
-      <p:sp>
-        <p:nvSpPr>
-          <p:cNvPr id="19" name="Text 17"/>
-          <p:cNvSpPr/>
-          <p:nvPr/>
-        </p:nvSpPr>
-        <p:spPr>
-          <a:xfrm>
-            <a:off x="4810125" y="2089696"/>
-            <a:ext cx="3789045" cy="266700"/>
-          </a:xfrm>
-          <a:prstGeom prst="rect">
-            <a:avLst/>
-          </a:prstGeom>
-          <a:noFill/>
-          <a:ln/>
-        </p:spPr>
-        <p:txBody>
-          <a:bodyPr wrap="square" lIns="304800" tIns="0" rIns="0" bIns="0" rtlCol="0" anchor="t"/>
-          <a:lstStyle/>
-          <a:p>
-            <a:pPr marL="0" indent="0" algn="l">
-              <a:lnSpc>
-                <a:spcPts val="2100"/>
-              </a:lnSpc>
-              <a:buNone/>
-            </a:pPr>
-            <a:r>
-              <a:rPr lang="en-US" sz="1500" dirty="0">
-                <a:solidFill>
-                  <a:srgbClr val="8B8BA0"/>
-                </a:solidFill>
-                <a:latin typeface="Arial" pitchFamily="34" charset="0"/>
-                <a:ea typeface="Arial" pitchFamily="34" charset="-122"/>
-                <a:cs typeface="Arial" pitchFamily="34" charset="-120"/>
-              </a:rPr>
-              <a:t>// n receivers</a:t>
-            </a:r>
-            <a:endParaRPr lang="en-US" sz="1500" dirty="0"/>
-          </a:p>
-        </p:txBody>
-      </p:sp>
-      <p:sp>
-        <p:nvSpPr>
-          <p:cNvPr id="20" name="Text 18"/>
-          <p:cNvSpPr/>
-          <p:nvPr/>
-        </p:nvSpPr>
-        <p:spPr>
-          <a:xfrm>
-            <a:off x="4810125" y="2356396"/>
-            <a:ext cx="3789045" cy="266700"/>
-          </a:xfrm>
-          <a:prstGeom prst="rect">
-            <a:avLst/>
-          </a:prstGeom>
-          <a:noFill/>
-          <a:ln/>
-        </p:spPr>
-        <p:txBody>
-          <a:bodyPr wrap="square" lIns="304800" tIns="0" rIns="0" bIns="0" rtlCol="0" anchor="t"/>
-          <a:lstStyle/>
-          <a:p>
-            <a:pPr marL="0" indent="0" algn="l">
-              <a:lnSpc>
-                <a:spcPts val="2100"/>
-              </a:lnSpc>
-              <a:buNone/>
-            </a:pPr>
-            <a:r>
-              <a:rPr lang="en-US" sz="1500" dirty="0">
-                <a:solidFill>
-                  <a:srgbClr val="22C55E"/>
-                </a:solidFill>
-                <a:latin typeface="Arial" pitchFamily="34" charset="0"/>
-                <a:ea typeface="Arial" pitchFamily="34" charset="-122"/>
-                <a:cs typeface="Arial" pitchFamily="34" charset="-120"/>
-              </a:rPr>
-              <a:t>Ok</a:t>
-            </a:r>
-            <a:r>
-              <a:rPr lang="en-US" sz="1500" dirty="0">
-                <a:solidFill>
-                  <a:srgbClr val="B8B8D0"/>
-                </a:solidFill>
-                <a:latin typeface="Arial" pitchFamily="34" charset="0"/>
-                <a:ea typeface="Arial" pitchFamily="34" charset="-122"/>
-                <a:cs typeface="Arial" pitchFamily="34" charset="-120"/>
-              </a:rPr>
-              <a:t>(n)</a:t>
-            </a:r>
-            <a:endParaRPr lang="en-US" sz="1500" dirty="0"/>
-          </a:p>
-        </p:txBody>
-      </p:sp>
-      <p:sp>
-        <p:nvSpPr>
-          <p:cNvPr id="21" name="Text 19"/>
-          <p:cNvSpPr/>
-          <p:nvPr/>
-        </p:nvSpPr>
-        <p:spPr>
-          <a:xfrm>
-            <a:off x="4810125" y="2623096"/>
-            <a:ext cx="3789045" cy="266700"/>
-          </a:xfrm>
-          <a:prstGeom prst="rect">
-            <a:avLst/>
-          </a:prstGeom>
-          <a:noFill/>
-          <a:ln/>
-        </p:spPr>
-        <p:txBody>
-          <a:bodyPr wrap="square" lIns="152400" tIns="0" rIns="0" bIns="0" rtlCol="0" anchor="t"/>
-          <a:lstStyle/>
-          <a:p>
-            <a:pPr marL="0" indent="0" algn="l">
-              <a:lnSpc>
-                <a:spcPts val="2100"/>
-              </a:lnSpc>
-              <a:buNone/>
-            </a:pPr>
-            <a:r>
-              <a:rPr lang="en-US" sz="1500" dirty="0">
-                <a:solidFill>
-                  <a:srgbClr val="B8B8D0"/>
-                </a:solidFill>
-                <a:latin typeface="Arial" pitchFamily="34" charset="0"/>
-                <a:ea typeface="Arial" pitchFamily="34" charset="-122"/>
-                <a:cs typeface="Arial" pitchFamily="34" charset="-120"/>
-              </a:rPr>
-              <a:t>}</a:t>
-            </a:r>
-            <a:endParaRPr lang="en-US" sz="1500" dirty="0"/>
-          </a:p>
-        </p:txBody>
-      </p:sp>
-      <p:sp>
-        <p:nvSpPr>
-          <p:cNvPr id="22" name="Text 20"/>
-          <p:cNvSpPr/>
-          <p:nvPr/>
-        </p:nvSpPr>
-        <p:spPr>
-          <a:xfrm>
-            <a:off x="4810125" y="2889796"/>
-            <a:ext cx="3789045" cy="266700"/>
-          </a:xfrm>
-          <a:prstGeom prst="rect">
-            <a:avLst/>
-          </a:prstGeom>
-          <a:noFill/>
-          <a:ln/>
-        </p:spPr>
-        <p:txBody>
-          <a:bodyPr wrap="square" lIns="152400" tIns="0" rIns="0" bIns="0" rtlCol="0" anchor="t"/>
-          <a:lstStyle/>
-          <a:p>
-            <a:pPr marL="0" indent="0" algn="l">
-              <a:lnSpc>
-                <a:spcPts val="2100"/>
-              </a:lnSpc>
-              <a:buNone/>
-            </a:pPr>
-            <a:r>
-              <a:rPr lang="en-US" sz="1500" dirty="0">
-                <a:solidFill>
-                  <a:srgbClr val="EF4444"/>
-                </a:solidFill>
-                <a:latin typeface="Arial" pitchFamily="34" charset="0"/>
-                <a:ea typeface="Arial" pitchFamily="34" charset="-122"/>
-                <a:cs typeface="Arial" pitchFamily="34" charset="-120"/>
-              </a:rPr>
-              <a:t>Err</a:t>
-            </a:r>
-            <a:r>
-              <a:rPr lang="en-US" sz="1500" dirty="0">
-                <a:solidFill>
-                  <a:srgbClr val="B8B8D0"/>
-                </a:solidFill>
-                <a:latin typeface="Arial" pitchFamily="34" charset="0"/>
-                <a:ea typeface="Arial" pitchFamily="34" charset="-122"/>
-                <a:cs typeface="Arial" pitchFamily="34" charset="-120"/>
-              </a:rPr>
-              <a:t>(_) =&gt; {</a:t>
-            </a:r>
-            <a:endParaRPr lang="en-US" sz="1500" dirty="0"/>
-          </a:p>
-        </p:txBody>
-      </p:sp>
-      <p:sp>
-        <p:nvSpPr>
-          <p:cNvPr id="23" name="Text 21"/>
-          <p:cNvSpPr/>
-          <p:nvPr/>
-        </p:nvSpPr>
-        <p:spPr>
-          <a:xfrm>
-            <a:off x="4810125" y="3156496"/>
-            <a:ext cx="3789045" cy="266700"/>
-          </a:xfrm>
-          <a:prstGeom prst="rect">
-            <a:avLst/>
-          </a:prstGeom>
-          <a:noFill/>
-          <a:ln/>
-        </p:spPr>
-        <p:txBody>
-          <a:bodyPr wrap="square" lIns="304800" tIns="0" rIns="0" bIns="0" rtlCol="0" anchor="t"/>
-          <a:lstStyle/>
-          <a:p>
-            <a:pPr marL="0" indent="0" algn="l">
-              <a:lnSpc>
-                <a:spcPts val="2100"/>
-              </a:lnSpc>
-              <a:buNone/>
-            </a:pPr>
-            <a:r>
-              <a:rPr lang="en-US" sz="1500" dirty="0">
-                <a:solidFill>
-                  <a:srgbClr val="8B8BA0"/>
-                </a:solidFill>
-                <a:latin typeface="Arial" pitchFamily="34" charset="0"/>
-                <a:ea typeface="Arial" pitchFamily="34" charset="-122"/>
-                <a:cs typeface="Arial" pitchFamily="34" charset="-120"/>
-              </a:rPr>
-              <a:t>// Not error!</a:t>
-            </a:r>
-            <a:endParaRPr lang="en-US" sz="1500" dirty="0"/>
-          </a:p>
-        </p:txBody>
-      </p:sp>
-      <p:sp>
-        <p:nvSpPr>
-          <p:cNvPr id="24" name="Text 22"/>
-          <p:cNvSpPr/>
-          <p:nvPr/>
-        </p:nvSpPr>
-        <p:spPr>
-          <a:xfrm>
-            <a:off x="4810125" y="3423196"/>
-            <a:ext cx="3789045" cy="266700"/>
-          </a:xfrm>
-          <a:prstGeom prst="rect">
-            <a:avLst/>
-          </a:prstGeom>
-          <a:noFill/>
-          <a:ln/>
-        </p:spPr>
-        <p:txBody>
-          <a:bodyPr wrap="square" lIns="304800" tIns="0" rIns="0" bIns="0" rtlCol="0" anchor="t"/>
-          <a:lstStyle/>
-          <a:p>
-            <a:pPr marL="0" indent="0" algn="l">
-              <a:lnSpc>
-                <a:spcPts val="2100"/>
-              </a:lnSpc>
-              <a:buNone/>
-            </a:pPr>
-            <a:r>
-              <a:rPr lang="en-US" sz="1500" dirty="0">
-                <a:solidFill>
-                  <a:srgbClr val="22C55E"/>
-                </a:solidFill>
-                <a:latin typeface="Arial" pitchFamily="34" charset="0"/>
-                <a:ea typeface="Arial" pitchFamily="34" charset="-122"/>
-                <a:cs typeface="Arial" pitchFamily="34" charset="-120"/>
-              </a:rPr>
-              <a:t>Ok</a:t>
-            </a:r>
-            <a:r>
-              <a:rPr lang="en-US" sz="1500" dirty="0">
-                <a:solidFill>
-                  <a:srgbClr val="B8B8D0"/>
-                </a:solidFill>
-                <a:latin typeface="Arial" pitchFamily="34" charset="0"/>
-                <a:ea typeface="Arial" pitchFamily="34" charset="-122"/>
-                <a:cs typeface="Arial" pitchFamily="34" charset="-120"/>
-              </a:rPr>
-              <a:t>(0)</a:t>
-            </a:r>
-            <a:endParaRPr lang="en-US" sz="1500" dirty="0"/>
-          </a:p>
-        </p:txBody>
-      </p:sp>
-      <p:sp>
-        <p:nvSpPr>
-          <p:cNvPr id="25" name="Text 23"/>
-          <p:cNvSpPr/>
-          <p:nvPr/>
-        </p:nvSpPr>
-        <p:spPr>
-          <a:xfrm>
-            <a:off x="4810125" y="3689896"/>
-            <a:ext cx="3789045" cy="266700"/>
-          </a:xfrm>
-          <a:prstGeom prst="rect">
-            <a:avLst/>
-          </a:prstGeom>
-          <a:noFill/>
-          <a:ln/>
-        </p:spPr>
-        <p:txBody>
-          <a:bodyPr wrap="square" lIns="152400" tIns="0" rIns="0" bIns="0" rtlCol="0" anchor="t"/>
-          <a:lstStyle/>
-          <a:p>
-            <a:pPr marL="0" indent="0" algn="l">
-              <a:lnSpc>
-                <a:spcPts val="2100"/>
-              </a:lnSpc>
-              <a:buNone/>
-            </a:pPr>
-            <a:r>
-              <a:rPr lang="en-US" sz="1500" dirty="0">
-                <a:solidFill>
-                  <a:srgbClr val="B8B8D0"/>
-                </a:solidFill>
-                <a:latin typeface="Arial" pitchFamily="34" charset="0"/>
-                <a:ea typeface="Arial" pitchFamily="34" charset="-122"/>
-                <a:cs typeface="Arial" pitchFamily="34" charset="-120"/>
-              </a:rPr>
-              <a:t>}</a:t>
-            </a:r>
-            <a:endParaRPr lang="en-US" sz="1500" dirty="0"/>
-          </a:p>
-        </p:txBody>
-      </p:sp>
-      <p:sp>
-        <p:nvSpPr>
-          <p:cNvPr id="26" name="Text 24"/>
-          <p:cNvSpPr/>
-          <p:nvPr/>
-        </p:nvSpPr>
-        <p:spPr>
-          <a:xfrm>
-            <a:off x="4810125" y="3956596"/>
-            <a:ext cx="3789045" cy="266700"/>
-          </a:xfrm>
-          <a:prstGeom prst="rect">
-            <a:avLst/>
-          </a:prstGeom>
-          <a:noFill/>
-          <a:ln/>
-        </p:spPr>
-        <p:txBody>
-          <a:bodyPr wrap="square" lIns="0" tIns="0" rIns="0" bIns="0" rtlCol="0" anchor="t"/>
-          <a:lstStyle/>
-          <a:p>
-            <a:pPr marL="0" indent="0" algn="l">
-              <a:lnSpc>
-                <a:spcPts val="2100"/>
-              </a:lnSpc>
-              <a:buNone/>
-            </a:pPr>
-            <a:r>
-              <a:rPr lang="en-US" sz="1500" dirty="0">
-                <a:solidFill>
-                  <a:srgbClr val="B8B8D0"/>
-                </a:solidFill>
-                <a:latin typeface="Arial" pitchFamily="34" charset="0"/>
-                <a:ea typeface="Arial" pitchFamily="34" charset="-122"/>
-                <a:cs typeface="Arial" pitchFamily="34" charset="-120"/>
-              </a:rPr>
-              <a:t>}</a:t>
-            </a:r>
-            <a:endParaRPr lang="en-US" sz="1500" dirty="0"/>
-          </a:p>
-        </p:txBody>
-      </p:sp>
-      <p:sp>
-        <p:nvSpPr>
-          <p:cNvPr id="27" name="Text 25"/>
-          <p:cNvSpPr/>
-          <p:nvPr/>
-        </p:nvSpPr>
-        <p:spPr>
-          <a:xfrm>
-            <a:off x="476250" y="4501604"/>
-            <a:ext cx="8191500" cy="356146"/>
-          </a:xfrm>
-          <a:prstGeom prst="roundRect">
-            <a:avLst>
-              <a:gd name="adj" fmla="val 21396"/>
-            </a:avLst>
-          </a:prstGeom>
-          <a:solidFill>
-            <a:srgbClr val="22C55E">
-              <a:alpha val="10000"/>
-            </a:srgbClr>
-          </a:solidFill>
-          <a:ln w="9525">
-            <a:solidFill>
-              <a:srgbClr val="22C55E"/>
-            </a:solidFill>
-          </a:ln>
-        </p:spPr>
-        <p:txBody>
-          <a:bodyPr wrap="square" rtlCol="0" anchor="ctr"/>
-          <a:lstStyle/>
-          <a:p>
-            <a:pPr marL="0" indent="0">
-              <a:buNone/>
-            </a:pPr>
-            <a:endParaRPr lang="en-US" dirty="0"/>
-          </a:p>
-        </p:txBody>
-      </p:sp>
-      <p:sp>
-        <p:nvSpPr>
-          <p:cNvPr id="28" name="Text 26"/>
-          <p:cNvSpPr/>
-          <p:nvPr/>
-        </p:nvSpPr>
-        <p:spPr>
-          <a:xfrm>
-            <a:off x="501206" y="4606379"/>
-            <a:ext cx="8141589" cy="146596"/>
-          </a:xfrm>
-          <a:prstGeom prst="rect">
-            <a:avLst/>
-          </a:prstGeom>
-          <a:noFill/>
-          <a:ln/>
-        </p:spPr>
-        <p:txBody>
-          <a:bodyPr wrap="square" lIns="0" tIns="0" rIns="0" bIns="0" rtlCol="0" anchor="t"/>
-          <a:lstStyle/>
-          <a:p>
-            <a:pPr marL="0" indent="0" algn="ctr">
-              <a:lnSpc>
-                <a:spcPts val="1155"/>
-              </a:lnSpc>
-              <a:buNone/>
-            </a:pPr>
-            <a:r>
-              <a:rPr lang="en-US" sz="825" dirty="0">
-                <a:solidFill>
-                  <a:srgbClr val="22C55E"/>
-                </a:solidFill>
-                <a:latin typeface="Arial" pitchFamily="34" charset="0"/>
-                <a:ea typeface="Arial" pitchFamily="34" charset="-122"/>
-                <a:cs typeface="Arial" pitchFamily="34" charset="-120"/>
-              </a:rPr>
-              <a:t>Zero receivers non e' errore: user_events garantisce delivery</a:t>
-            </a:r>
-            <a:endParaRPr lang="en-US" sz="825" dirty="0"/>
-          </a:p>
-        </p:txBody>
-      </p:sp>
-    </p:spTree>
-  </p:cSld>
-  <p:clrMapOvr>
-    <a:masterClrMapping/>
-  </p:clrMapOvr>
-</p:sld>
-</file>
-
-<file path=ppt/slides/slide15.xml><?xml version="1.0" encoding="utf-8"?>
+<file path=ppt/slides/slide13.xml><?xml version="1.0" encoding="utf-8"?>
 <p:sld xmlns:a="http://schemas.openxmlformats.org/drawingml/2006/main" xmlns:r="http://schemas.openxmlformats.org/officeDocument/2006/relationships" xmlns:p="http://schemas.openxmlformats.org/presentationml/2006/main">
   <p:cSld name="Slide 8">
     <p:bg>
@@ -10508,7 +7793,7 @@
 </p:sld>
 </file>
 
-<file path=ppt/slides/slide16.xml><?xml version="1.0" encoding="utf-8"?>
+<file path=ppt/slides/slide14.xml><?xml version="1.0" encoding="utf-8"?>
 <p:sld xmlns:a="http://schemas.openxmlformats.org/drawingml/2006/main" xmlns:r="http://schemas.openxmlformats.org/officeDocument/2006/relationships" xmlns:p="http://schemas.openxmlformats.org/presentationml/2006/main">
   <p:cSld name="Slide 12">
     <p:bg>
@@ -11188,7 +8473,7 @@
 </p:sld>
 </file>
 
-<file path=ppt/slides/slide17.xml><?xml version="1.0" encoding="utf-8"?>
+<file path=ppt/slides/slide15.xml><?xml version="1.0" encoding="utf-8"?>
 <p:sld xmlns:a="http://schemas.openxmlformats.org/drawingml/2006/main" xmlns:r="http://schemas.openxmlformats.org/officeDocument/2006/relationships" xmlns:p="http://schemas.openxmlformats.org/presentationml/2006/main">
   <p:cSld>
     <p:bg>
@@ -11910,7 +9195,7 @@
 </p:sld>
 </file>
 
-<file path=ppt/slides/slide18.xml><?xml version="1.0" encoding="utf-8"?>
+<file path=ppt/slides/slide16.xml><?xml version="1.0" encoding="utf-8"?>
 <p:sld xmlns:a="http://schemas.openxmlformats.org/drawingml/2006/main" xmlns:r="http://schemas.openxmlformats.org/officeDocument/2006/relationships" xmlns:p="http://schemas.openxmlformats.org/presentationml/2006/main">
   <p:cSld name="Slide 13">
     <p:bg>
@@ -23420,21 +20705,27 @@
             <a:r>
               <a:rPr lang="en-US" sz="1000" b="1" dirty="0">
                 <a:solidFill>
-                  <a:srgbClr val="92400E"/>
-                </a:solidFill>
-                <a:latin typeface="Trebuchet MS" pitchFamily="34" charset="0"/>
+                  <a:schemeClr val="bg1"/>
+                </a:solidFill>
+                <a:latin typeface="Arial" panose="020B0604020202020204" pitchFamily="34" charset="0"/>
                 <a:ea typeface="Trebuchet MS" pitchFamily="34" charset="-122"/>
-                <a:cs typeface="Trebuchet MS" pitchFamily="34" charset="-120"/>
+                <a:cs typeface="Arial" panose="020B0604020202020204" pitchFamily="34" charset="0"/>
               </a:rPr>
               <a:t>DUAL SEQUENCE SYSTEM</a:t>
             </a:r>
-            <a:endParaRPr lang="en-US" sz="1000" dirty="0"/>
+            <a:endParaRPr lang="en-US" sz="1000" dirty="0">
+              <a:solidFill>
+                <a:schemeClr val="bg1"/>
+              </a:solidFill>
+              <a:latin typeface="Arial" panose="020B0604020202020204" pitchFamily="34" charset="0"/>
+              <a:cs typeface="Arial" panose="020B0604020202020204" pitchFamily="34" charset="0"/>
+            </a:endParaRPr>
           </a:p>
           <a:p>
             <a:r>
               <a:rPr lang="en-US" sz="900" dirty="0">
                 <a:solidFill>
-                  <a:srgbClr val="78350F"/>
+                  <a:schemeClr val="bg1"/>
                 </a:solidFill>
                 <a:latin typeface="Arial" pitchFamily="34" charset="0"/>
                 <a:ea typeface="Arial" pitchFamily="34" charset="-122"/>
@@ -23445,7 +20736,7 @@
             <a:r>
               <a:rPr lang="en-US" sz="900" dirty="0" err="1">
                 <a:solidFill>
-                  <a:srgbClr val="78350F"/>
+                  <a:schemeClr val="bg1"/>
                 </a:solidFill>
                 <a:latin typeface="Arial" pitchFamily="34" charset="0"/>
                 <a:ea typeface="Arial" pitchFamily="34" charset="-122"/>
@@ -23456,7 +20747,7 @@
             <a:r>
               <a:rPr lang="en-US" sz="900" dirty="0">
                 <a:solidFill>
-                  <a:srgbClr val="78350F"/>
+                  <a:schemeClr val="bg1"/>
                 </a:solidFill>
                 <a:latin typeface="Arial" pitchFamily="34" charset="0"/>
                 <a:ea typeface="Arial" pitchFamily="34" charset="-122"/>
@@ -23467,7 +20758,7 @@
             <a:r>
               <a:rPr lang="en-US" sz="900" dirty="0" err="1">
                 <a:solidFill>
-                  <a:srgbClr val="78350F"/>
+                  <a:schemeClr val="bg1"/>
                 </a:solidFill>
                 <a:latin typeface="Arial" pitchFamily="34" charset="0"/>
                 <a:ea typeface="Arial" pitchFamily="34" charset="-122"/>
@@ -23478,7 +20769,7 @@
             <a:r>
               <a:rPr lang="en-US" sz="900" dirty="0">
                 <a:solidFill>
-                  <a:srgbClr val="78350F"/>
+                  <a:schemeClr val="bg1"/>
                 </a:solidFill>
                 <a:latin typeface="Arial" pitchFamily="34" charset="0"/>
                 <a:ea typeface="Arial" pitchFamily="34" charset="-122"/>
@@ -23489,7 +20780,7 @@
             <a:r>
               <a:rPr lang="en-US" sz="900" dirty="0" err="1">
                 <a:solidFill>
-                  <a:srgbClr val="78350F"/>
+                  <a:schemeClr val="bg1"/>
                 </a:solidFill>
                 <a:latin typeface="Arial" pitchFamily="34" charset="0"/>
                 <a:ea typeface="Arial" pitchFamily="34" charset="-122"/>
@@ -23500,7 +20791,7 @@
             <a:r>
               <a:rPr lang="en-US" sz="900" dirty="0">
                 <a:solidFill>
-                  <a:srgbClr val="78350F"/>
+                  <a:schemeClr val="bg1"/>
                 </a:solidFill>
                 <a:latin typeface="Arial" pitchFamily="34" charset="0"/>
                 <a:ea typeface="Arial" pitchFamily="34" charset="-122"/>
@@ -23511,7 +20802,7 @@
             <a:r>
               <a:rPr lang="en-US" sz="900" dirty="0" err="1">
                 <a:solidFill>
-                  <a:srgbClr val="78350F"/>
+                  <a:schemeClr val="bg1"/>
                 </a:solidFill>
                 <a:latin typeface="Arial" pitchFamily="34" charset="0"/>
                 <a:ea typeface="Arial" pitchFamily="34" charset="-122"/>
@@ -23522,7 +20813,7 @@
             <a:r>
               <a:rPr lang="en-US" sz="900" dirty="0">
                 <a:solidFill>
-                  <a:srgbClr val="78350F"/>
+                  <a:schemeClr val="bg1"/>
                 </a:solidFill>
                 <a:latin typeface="Arial" pitchFamily="34" charset="0"/>
                 <a:ea typeface="Arial" pitchFamily="34" charset="-122"/>
@@ -23533,7 +20824,7 @@
             <a:r>
               <a:rPr lang="en-US" sz="900" dirty="0" err="1">
                 <a:solidFill>
-                  <a:srgbClr val="78350F"/>
+                  <a:schemeClr val="bg1"/>
                 </a:solidFill>
                 <a:latin typeface="Arial" pitchFamily="34" charset="0"/>
                 <a:ea typeface="Arial" pitchFamily="34" charset="-122"/>
@@ -23544,7 +20835,7 @@
             <a:r>
               <a:rPr lang="en-US" sz="900" dirty="0">
                 <a:solidFill>
-                  <a:srgbClr val="78350F"/>
+                  <a:schemeClr val="bg1"/>
                 </a:solidFill>
                 <a:latin typeface="Arial" pitchFamily="34" charset="0"/>
                 <a:ea typeface="Arial" pitchFamily="34" charset="-122"/>
@@ -23555,7 +20846,7 @@
             <a:r>
               <a:rPr lang="en-US" sz="900" dirty="0" err="1">
                 <a:solidFill>
-                  <a:srgbClr val="78350F"/>
+                  <a:schemeClr val="bg1"/>
                 </a:solidFill>
                 <a:latin typeface="Arial" pitchFamily="34" charset="0"/>
                 <a:ea typeface="Arial" pitchFamily="34" charset="-122"/>
@@ -23566,7 +20857,7 @@
             <a:r>
               <a:rPr lang="en-US" sz="900" dirty="0">
                 <a:solidFill>
-                  <a:srgbClr val="78350F"/>
+                  <a:schemeClr val="bg1"/>
                 </a:solidFill>
                 <a:latin typeface="Arial" pitchFamily="34" charset="0"/>
                 <a:ea typeface="Arial" pitchFamily="34" charset="-122"/>
@@ -23577,7 +20868,7 @@
             <a:r>
               <a:rPr lang="en-US" sz="900" dirty="0" err="1">
                 <a:solidFill>
-                  <a:srgbClr val="78350F"/>
+                  <a:schemeClr val="bg1"/>
                 </a:solidFill>
                 <a:latin typeface="Arial" pitchFamily="34" charset="0"/>
                 <a:ea typeface="Arial" pitchFamily="34" charset="-122"/>
@@ -23588,7 +20879,7 @@
             <a:r>
               <a:rPr lang="en-US" sz="900" dirty="0">
                 <a:solidFill>
-                  <a:srgbClr val="78350F"/>
+                  <a:schemeClr val="bg1"/>
                 </a:solidFill>
                 <a:latin typeface="Arial" pitchFamily="34" charset="0"/>
                 <a:ea typeface="Arial" pitchFamily="34" charset="-122"/>
@@ -23599,7 +20890,7 @@
             <a:r>
               <a:rPr lang="en-US" sz="900" dirty="0" err="1">
                 <a:solidFill>
-                  <a:srgbClr val="78350F"/>
+                  <a:schemeClr val="bg1"/>
                 </a:solidFill>
                 <a:latin typeface="Arial" pitchFamily="34" charset="0"/>
                 <a:ea typeface="Arial" pitchFamily="34" charset="-122"/>
@@ -23610,7 +20901,7 @@
             <a:r>
               <a:rPr lang="en-US" sz="900" dirty="0">
                 <a:solidFill>
-                  <a:srgbClr val="78350F"/>
+                  <a:schemeClr val="bg1"/>
                 </a:solidFill>
                 <a:latin typeface="Arial" pitchFamily="34" charset="0"/>
                 <a:ea typeface="Arial" pitchFamily="34" charset="-122"/>
@@ -23621,7 +20912,7 @@
             <a:r>
               <a:rPr lang="en-US" sz="900" dirty="0" err="1">
                 <a:solidFill>
-                  <a:srgbClr val="78350F"/>
+                  <a:schemeClr val="bg1"/>
                 </a:solidFill>
                 <a:latin typeface="Arial" pitchFamily="34" charset="0"/>
                 <a:ea typeface="Arial" pitchFamily="34" charset="-122"/>
@@ -23632,7 +20923,7 @@
             <a:r>
               <a:rPr lang="en-US" sz="900" dirty="0">
                 <a:solidFill>
-                  <a:srgbClr val="78350F"/>
+                  <a:schemeClr val="bg1"/>
                 </a:solidFill>
                 <a:latin typeface="Arial" pitchFamily="34" charset="0"/>
                 <a:ea typeface="Arial" pitchFamily="34" charset="-122"/>
@@ -23643,7 +20934,7 @@
             <a:r>
               <a:rPr lang="en-US" sz="900" dirty="0" err="1">
                 <a:solidFill>
-                  <a:srgbClr val="78350F"/>
+                  <a:schemeClr val="bg1"/>
                 </a:solidFill>
                 <a:latin typeface="Arial" pitchFamily="34" charset="0"/>
                 <a:ea typeface="Arial" pitchFamily="34" charset="-122"/>
@@ -23651,7 +20942,11 @@
               </a:rPr>
               <a:t>disconnessione</a:t>
             </a:r>
-            <a:endParaRPr lang="en-US" sz="900" dirty="0"/>
+            <a:endParaRPr lang="en-US" sz="900" dirty="0">
+              <a:solidFill>
+                <a:schemeClr val="bg1"/>
+              </a:solidFill>
+            </a:endParaRPr>
           </a:p>
         </p:txBody>
       </p:sp>
